--- a/docs/NWIS_Pitch_Deck.pptx
+++ b/docs/NWIS_Pitch_Deck.pptx
@@ -10291,7 +10291,7 @@
                 <a:ea typeface="Calibri" pitchFamily="34" charset="-122"/>
                 <a:cs typeface="Calibri" pitchFamily="34" charset="-120"/>
               </a:rPr>
-              <a:t>Runs offline on a laptop · deterministic demo mode · REST API with OpenAPI docs · 8 end-to-end tests</a:t>
+              <a:t>Runs offline on a laptop · deterministic demo mode · REST API with OpenAPI docs · 10 end-to-end tests</a:t>
             </a:r>
             <a:endParaRPr lang="en-US" sz="1300" dirty="0"/>
           </a:p>

--- a/docs/NWIS_Pitch_Deck.pptx
+++ b/docs/NWIS_Pitch_Deck.pptx
@@ -7275,7 +7275,7 @@
       </p:sp>
       <p:pic>
         <p:nvPicPr>
-          <p:cNvPr id="9" name="Image 0" descr="C:\Users\aryab\AppData\Local\Temp\claude\c--Users-aryab-OneDrive-Desktop-sihps2\e4cddc0f-6c3f-4b80-a000-70a2b8b58628\scratchpad\shots\why-crop.png">    </p:cNvPr>
+          <p:cNvPr id="9" name="Image 0" descr="C:\Users\aryab\OneDrive\Desktop\sihps2\tools\.why-crop.png">    </p:cNvPr>
           <p:cNvPicPr>
             <a:picLocks noChangeAspect="1"/>
           </p:cNvPicPr>

--- a/docs/NWIS_Pitch_Deck.pptx
+++ b/docs/NWIS_Pitch_Deck.pptx
@@ -144,7 +144,7 @@
           </c:tx>
           <c:spPr>
             <a:solidFill>
-              <a:srgbClr val="38BDF8"/>
+              <a:srgbClr val="0EA5E9"/>
             </a:solidFill>
             <a:effectLst/>
           </c:spPr>
@@ -158,7 +158,7 @@
                 <a:pPr>
                   <a:defRPr b="0" i="0" strike="noStrike" sz="1000" u="none">
                     <a:solidFill>
-                      <a:srgbClr val="F1F5F9"/>
+                      <a:srgbClr val="F5F5F8"/>
                     </a:solidFill>
                     <a:latin typeface="Arial"/>
                   </a:defRPr>
@@ -238,7 +238,7 @@
               <a:pPr>
                 <a:defRPr b="0" i="0" strike="noStrike" sz="1000" u="none">
                   <a:solidFill>
-                    <a:srgbClr val="F1F5F9"/>
+                    <a:srgbClr val="F5F5F8"/>
                   </a:solidFill>
                   <a:latin typeface="Arial"/>
                 </a:defRPr>
@@ -284,7 +284,7 @@
             <a:pPr>
               <a:defRPr sz="1000" b="0" i="0" u="none" strike="noStrike">
                 <a:solidFill>
-                  <a:srgbClr val="94A3B8"/>
+                  <a:srgbClr val="C4C6D2"/>
                 </a:solidFill>
                 <a:latin typeface="Arial"/>
               </a:defRPr>
@@ -845,7 +845,7 @@
           <a:p>
             <a:r>
               <a:rPr lang="en-US" dirty="0"/>
-              <a:t>Close: decision support — the engineer decides. Be explicit that all data shown is synthetic and that the risk weights are transparent, not trained.</a:t>
+              <a:t>Close: decision support — the engineer decides. Be explicit that the data is realistic synthetic data on real Assam stratigraphy, and that the hand-set weights drive alerts while a learned model cross-checks them.</a:t>
             </a:r>
             <a:endParaRPr lang="en-US" dirty="0"/>
           </a:p>
@@ -1285,7 +1285,7 @@
           <a:p>
             <a:r>
               <a:rPr lang="en-US" dirty="0"/>
-              <a:t>Never a mysterious 'AI says high risk'. The Why? view lists numbered reasons, the weighted factor breakdown, live signals versus baseline, the supporting offset wells with quotes and page citations, recommended checks, and the audit trail. Scores rank risk; they are not calibrated probabilities.</a:t>
+              <a:t>Never a mysterious 'AI says high risk'. The Why? view lists numbered reasons, the weighted factor breakdown, live signals versus baseline, the supporting offset wells with quotes and page citations, recommended checks, and the audit trail. Scores rank risk; they are not calibrated probabilities. A logistic model on the same six factors, backtested leave-one-well-out on the offset wells, cross-checks every score (the ML chip) — and learned that live parameter anomalies matter more than our hand-set weights assumed.</a:t>
             </a:r>
             <a:endParaRPr lang="en-US" dirty="0"/>
           </a:p>
@@ -1461,7 +1461,7 @@
           <a:p>
             <a:r>
               <a:rPr lang="en-US" dirty="0"/>
-              <a:t>Process the sample daily drilling report for OIL-AX-22: three candidate events, one flagged as a possible duplicate, entities extracted, provenance kept. Save, then search for it.</a:t>
+              <a:t>Process the sample daily drilling report for OIL-AX-22: three candidate events, one flagged as a possible duplicate, entities extracted, provenance kept. Save, then search for it. Then process the scanned OIL-AX-44 report: no text layer at all — Tesseract reads it at ~93% word confidence and the same extraction finds the differential sticking at 2,655 m.</a:t>
             </a:r>
             <a:endParaRPr lang="en-US" dirty="0"/>
           </a:p>
@@ -1904,7 +1904,7 @@
     <p:bg>
       <p:bgPr>
         <a:solidFill>
-          <a:srgbClr val="0A0E17"/>
+          <a:srgbClr val="09090E"/>
         </a:solidFill>
       </p:bgPr>
     </p:bg>
@@ -1963,39 +1963,14 @@
             <a:avLst/>
           </a:prstGeom>
           <a:solidFill>
-            <a:srgbClr val="0A0E17"/>
+            <a:srgbClr val="09090E"/>
           </a:solidFill>
           <a:ln/>
-        </p:spPr>
-      </p:sp>
-      <p:sp>
-        <p:nvSpPr>
-          <p:cNvPr id="4" name="Shape 1"/>
-          <p:cNvSpPr/>
-          <p:nvPr/>
-        </p:nvSpPr>
-        <p:spPr>
-          <a:xfrm>
-            <a:off x="731520" y="1234440"/>
-            <a:ext cx="822960" cy="822960"/>
-          </a:xfrm>
-          <a:prstGeom prst="ellipse">
-            <a:avLst/>
-          </a:prstGeom>
-          <a:solidFill>
-            <a:srgbClr val="1E293B"/>
-          </a:solidFill>
-          <a:ln w="15875">
-            <a:solidFill>
-              <a:srgbClr val="22D3EE"/>
-            </a:solidFill>
-            <a:prstDash val="solid"/>
-          </a:ln>
         </p:spPr>
       </p:sp>
       <p:pic>
         <p:nvPicPr>
-          <p:cNvPr id="5" name="Image 1" descr="preencoded.png">    </p:cNvPr>
+          <p:cNvPr id="4" name="Image 1" descr="C:\Users\aryab\OneDrive\Desktop\sihps2\docs\nwis-logo.png">    </p:cNvPr>
           <p:cNvPicPr>
             <a:picLocks noChangeAspect="1"/>
           </p:cNvPicPr>
@@ -2009,8 +1984,8 @@
         </p:blipFill>
         <p:spPr>
           <a:xfrm>
-            <a:off x="912571" y="1415491"/>
-            <a:ext cx="460858" cy="460858"/>
+            <a:off x="731520" y="1188720"/>
+            <a:ext cx="914400" cy="914400"/>
           </a:xfrm>
           <a:prstGeom prst="rect">
             <a:avLst/>
@@ -2019,7 +1994,7 @@
       </p:pic>
       <p:sp>
         <p:nvSpPr>
-          <p:cNvPr id="6" name="Text 2"/>
+          <p:cNvPr id="5" name="Text 1"/>
           <p:cNvSpPr txBox="1"/>
           <p:nvPr/>
         </p:nvSpPr>
@@ -2044,7 +2019,7 @@
             <a:r>
               <a:rPr lang="en-US" sz="7200" b="1" spc="800" kern="0" dirty="0">
                 <a:solidFill>
-                  <a:srgbClr val="22D3EE"/>
+                  <a:srgbClr val="F5F5F8"/>
                 </a:solidFill>
                 <a:latin typeface="Calibri" pitchFamily="34" charset="0"/>
                 <a:ea typeface="Calibri" pitchFamily="34" charset="-122"/>
@@ -2058,7 +2033,7 @@
       </p:sp>
       <p:sp>
         <p:nvSpPr>
-          <p:cNvPr id="7" name="Text 3"/>
+          <p:cNvPr id="6" name="Text 2"/>
           <p:cNvSpPr txBox="1"/>
           <p:nvPr/>
         </p:nvSpPr>
@@ -2083,7 +2058,7 @@
             <a:r>
               <a:rPr lang="en-US" sz="2600" b="1" dirty="0">
                 <a:solidFill>
-                  <a:srgbClr val="F1F5F9"/>
+                  <a:srgbClr val="F5F5F8"/>
                 </a:solidFill>
                 <a:latin typeface="Calibri" pitchFamily="34" charset="0"/>
                 <a:ea typeface="Calibri" pitchFamily="34" charset="-122"/>
@@ -2097,7 +2072,7 @@
       </p:sp>
       <p:sp>
         <p:nvSpPr>
-          <p:cNvPr id="8" name="Text 4"/>
+          <p:cNvPr id="7" name="Text 3"/>
           <p:cNvSpPr txBox="1"/>
           <p:nvPr/>
         </p:nvSpPr>
@@ -2122,7 +2097,7 @@
             <a:r>
               <a:rPr lang="en-US" sz="1500" dirty="0">
                 <a:solidFill>
-                  <a:srgbClr val="94A3B8"/>
+                  <a:srgbClr val="C4C6D2"/>
                 </a:solidFill>
                 <a:latin typeface="Calibri" pitchFamily="34" charset="0"/>
                 <a:ea typeface="Calibri" pitchFamily="34" charset="-122"/>
@@ -2136,7 +2111,7 @@
       </p:sp>
       <p:sp>
         <p:nvSpPr>
-          <p:cNvPr id="9" name="Text 5"/>
+          <p:cNvPr id="8" name="Text 4"/>
           <p:cNvSpPr txBox="1"/>
           <p:nvPr/>
         </p:nvSpPr>
@@ -2161,7 +2136,7 @@
             <a:r>
               <a:rPr lang="en-US" sz="1200" dirty="0">
                 <a:solidFill>
-                  <a:srgbClr val="64748B"/>
+                  <a:srgbClr val="8C8FA1"/>
                 </a:solidFill>
                 <a:latin typeface="Calibri" pitchFamily="34" charset="0"/>
                 <a:ea typeface="Calibri" pitchFamily="34" charset="-122"/>
@@ -2175,7 +2150,7 @@
       </p:sp>
       <p:sp>
         <p:nvSpPr>
-          <p:cNvPr id="10" name="Text 6"/>
+          <p:cNvPr id="9" name="Text 5"/>
           <p:cNvSpPr txBox="1"/>
           <p:nvPr/>
         </p:nvSpPr>
@@ -2200,13 +2175,13 @@
             <a:r>
               <a:rPr lang="en-US" sz="1000" dirty="0">
                 <a:solidFill>
-                  <a:srgbClr val="F59E0B"/>
-                </a:solidFill>
-                <a:latin typeface="Calibri" pitchFamily="34" charset="0"/>
-                <a:ea typeface="Calibri" pitchFamily="34" charset="-122"/>
-                <a:cs typeface="Calibri" pitchFamily="34" charset="-120"/>
-              </a:rPr>
-              <a:t>Working prototype · synthetic demo data (not OIL operational records)</a:t>
+                  <a:srgbClr val="F2A60C"/>
+                </a:solidFill>
+                <a:latin typeface="Calibri" pitchFamily="34" charset="0"/>
+                <a:ea typeface="Calibri" pitchFamily="34" charset="-122"/>
+                <a:cs typeface="Calibri" pitchFamily="34" charset="-120"/>
+              </a:rPr>
+              <a:t>Working prototype · realistic synthetic data on real Upper Assam stratigraphy (not OIL records)</a:t>
             </a:r>
             <a:endParaRPr lang="en-US" sz="1000" dirty="0"/>
           </a:p>
@@ -2226,7 +2201,7 @@
     <p:bg>
       <p:bgPr>
         <a:solidFill>
-          <a:srgbClr val="0A0E17"/>
+          <a:srgbClr val="09090E"/>
         </a:solidFill>
       </p:bgPr>
     </p:bg>
@@ -2271,7 +2246,7 @@
             <a:r>
               <a:rPr lang="en-US" sz="1200" b="1" spc="300" kern="0" dirty="0">
                 <a:solidFill>
-                  <a:srgbClr val="22D3EE"/>
+                  <a:srgbClr val="A79DFF"/>
                 </a:solidFill>
                 <a:latin typeface="Calibri" pitchFamily="34" charset="0"/>
                 <a:ea typeface="Calibri" pitchFamily="34" charset="-122"/>
@@ -2310,7 +2285,7 @@
             <a:r>
               <a:rPr lang="en-US" sz="3200" b="1" dirty="0">
                 <a:solidFill>
-                  <a:srgbClr val="F1F5F9"/>
+                  <a:srgbClr val="F5F5F8"/>
                 </a:solidFill>
                 <a:latin typeface="Calibri" pitchFamily="34" charset="0"/>
                 <a:ea typeface="Calibri" pitchFamily="34" charset="-122"/>
@@ -2335,15 +2310,15 @@
           </a:xfrm>
           <a:prstGeom prst="roundRect">
             <a:avLst>
-              <a:gd name="adj" fmla="val 5217"/>
+              <a:gd name="adj" fmla="val 1304"/>
             </a:avLst>
           </a:prstGeom>
           <a:solidFill>
-            <a:srgbClr val="111827"/>
+            <a:srgbClr val="121219"/>
           </a:solidFill>
           <a:ln w="12700">
             <a:solidFill>
-              <a:srgbClr val="1E3A5F"/>
+              <a:srgbClr val="32323E"/>
             </a:solidFill>
             <a:prstDash val="solid"/>
           </a:ln>
@@ -2364,11 +2339,11 @@
             <a:avLst/>
           </a:prstGeom>
           <a:solidFill>
-            <a:srgbClr val="1E293B"/>
+            <a:srgbClr val="1F1F29"/>
           </a:solidFill>
           <a:ln w="15875">
             <a:solidFill>
-              <a:srgbClr val="1E3A5F"/>
+              <a:srgbClr val="32323E"/>
             </a:solidFill>
             <a:prstDash val="solid"/>
           </a:ln>
@@ -2425,7 +2400,7 @@
             <a:r>
               <a:rPr lang="en-US" sz="1800" b="1" dirty="0">
                 <a:solidFill>
-                  <a:srgbClr val="F1F5F9"/>
+                  <a:srgbClr val="F5F5F8"/>
                 </a:solidFill>
                 <a:latin typeface="Calibri" pitchFamily="34" charset="0"/>
                 <a:ea typeface="Calibri" pitchFamily="34" charset="-122"/>
@@ -2464,7 +2439,7 @@
             <a:r>
               <a:rPr lang="en-US" sz="1350" dirty="0">
                 <a:solidFill>
-                  <a:srgbClr val="94A3B8"/>
+                  <a:srgbClr val="C4C6D2"/>
                 </a:solidFill>
                 <a:latin typeface="Calibri" pitchFamily="34" charset="0"/>
                 <a:ea typeface="Calibri" pitchFamily="34" charset="-122"/>
@@ -2489,15 +2464,15 @@
           </a:xfrm>
           <a:prstGeom prst="roundRect">
             <a:avLst>
-              <a:gd name="adj" fmla="val 5217"/>
+              <a:gd name="adj" fmla="val 1304"/>
             </a:avLst>
           </a:prstGeom>
           <a:solidFill>
-            <a:srgbClr val="111827"/>
+            <a:srgbClr val="121219"/>
           </a:solidFill>
           <a:ln w="12700">
             <a:solidFill>
-              <a:srgbClr val="1E3A5F"/>
+              <a:srgbClr val="32323E"/>
             </a:solidFill>
             <a:prstDash val="solid"/>
           </a:ln>
@@ -2518,11 +2493,11 @@
             <a:avLst/>
           </a:prstGeom>
           <a:solidFill>
-            <a:srgbClr val="1E293B"/>
+            <a:srgbClr val="1F1F29"/>
           </a:solidFill>
           <a:ln w="15875">
             <a:solidFill>
-              <a:srgbClr val="1E3A5F"/>
+              <a:srgbClr val="32323E"/>
             </a:solidFill>
             <a:prstDash val="solid"/>
           </a:ln>
@@ -2579,7 +2554,7 @@
             <a:r>
               <a:rPr lang="en-US" sz="1800" b="1" dirty="0">
                 <a:solidFill>
-                  <a:srgbClr val="F1F5F9"/>
+                  <a:srgbClr val="F5F5F8"/>
                 </a:solidFill>
                 <a:latin typeface="Calibri" pitchFamily="34" charset="0"/>
                 <a:ea typeface="Calibri" pitchFamily="34" charset="-122"/>
@@ -2618,7 +2593,7 @@
             <a:r>
               <a:rPr lang="en-US" sz="1350" dirty="0">
                 <a:solidFill>
-                  <a:srgbClr val="94A3B8"/>
+                  <a:srgbClr val="C4C6D2"/>
                 </a:solidFill>
                 <a:latin typeface="Calibri" pitchFamily="34" charset="0"/>
                 <a:ea typeface="Calibri" pitchFamily="34" charset="-122"/>
@@ -2643,15 +2618,15 @@
           </a:xfrm>
           <a:prstGeom prst="roundRect">
             <a:avLst>
-              <a:gd name="adj" fmla="val 5217"/>
+              <a:gd name="adj" fmla="val 1304"/>
             </a:avLst>
           </a:prstGeom>
           <a:solidFill>
-            <a:srgbClr val="111827"/>
+            <a:srgbClr val="121219"/>
           </a:solidFill>
           <a:ln w="12700">
             <a:solidFill>
-              <a:srgbClr val="1E3A5F"/>
+              <a:srgbClr val="32323E"/>
             </a:solidFill>
             <a:prstDash val="solid"/>
           </a:ln>
@@ -2672,11 +2647,11 @@
             <a:avLst/>
           </a:prstGeom>
           <a:solidFill>
-            <a:srgbClr val="1E293B"/>
+            <a:srgbClr val="1F1F29"/>
           </a:solidFill>
           <a:ln w="15875">
             <a:solidFill>
-              <a:srgbClr val="1E3A5F"/>
+              <a:srgbClr val="32323E"/>
             </a:solidFill>
             <a:prstDash val="solid"/>
           </a:ln>
@@ -2733,7 +2708,7 @@
             <a:r>
               <a:rPr lang="en-US" sz="1800" b="1" dirty="0">
                 <a:solidFill>
-                  <a:srgbClr val="F1F5F9"/>
+                  <a:srgbClr val="F5F5F8"/>
                 </a:solidFill>
                 <a:latin typeface="Calibri" pitchFamily="34" charset="0"/>
                 <a:ea typeface="Calibri" pitchFamily="34" charset="-122"/>
@@ -2772,7 +2747,7 @@
             <a:r>
               <a:rPr lang="en-US" sz="1350" dirty="0">
                 <a:solidFill>
-                  <a:srgbClr val="94A3B8"/>
+                  <a:srgbClr val="C4C6D2"/>
                 </a:solidFill>
                 <a:latin typeface="Calibri" pitchFamily="34" charset="0"/>
                 <a:ea typeface="Calibri" pitchFamily="34" charset="-122"/>
@@ -2811,7 +2786,7 @@
             <a:r>
               <a:rPr lang="en-US" sz="1200" b="1" spc="300" kern="0" dirty="0">
                 <a:solidFill>
-                  <a:srgbClr val="F59E0B"/>
+                  <a:srgbClr val="F2A60C"/>
                 </a:solidFill>
                 <a:latin typeface="Calibri" pitchFamily="34" charset="0"/>
                 <a:ea typeface="Calibri" pitchFamily="34" charset="-122"/>
@@ -2850,7 +2825,7 @@
             <a:r>
               <a:rPr lang="en-US" sz="3000" b="1" dirty="0">
                 <a:solidFill>
-                  <a:srgbClr val="22D3EE"/>
+                  <a:srgbClr val="A79DFF"/>
                 </a:solidFill>
                 <a:latin typeface="Consolas" pitchFamily="34" charset="0"/>
                 <a:ea typeface="Consolas" pitchFamily="34" charset="-122"/>
@@ -2889,7 +2864,7 @@
             <a:r>
               <a:rPr lang="en-US" sz="1500" b="1" dirty="0">
                 <a:solidFill>
-                  <a:srgbClr val="F1F5F9"/>
+                  <a:srgbClr val="F5F5F8"/>
                 </a:solidFill>
                 <a:latin typeface="Calibri" pitchFamily="34" charset="0"/>
                 <a:ea typeface="Calibri" pitchFamily="34" charset="-122"/>
@@ -2928,7 +2903,7 @@
             <a:r>
               <a:rPr lang="en-US" sz="3000" b="1" dirty="0">
                 <a:solidFill>
-                  <a:srgbClr val="22D3EE"/>
+                  <a:srgbClr val="A79DFF"/>
                 </a:solidFill>
                 <a:latin typeface="Consolas" pitchFamily="34" charset="0"/>
                 <a:ea typeface="Consolas" pitchFamily="34" charset="-122"/>
@@ -2967,7 +2942,7 @@
             <a:r>
               <a:rPr lang="en-US" sz="1500" b="1" dirty="0">
                 <a:solidFill>
-                  <a:srgbClr val="F1F5F9"/>
+                  <a:srgbClr val="F5F5F8"/>
                 </a:solidFill>
                 <a:latin typeface="Calibri" pitchFamily="34" charset="0"/>
                 <a:ea typeface="Calibri" pitchFamily="34" charset="-122"/>
@@ -3006,7 +2981,7 @@
             <a:r>
               <a:rPr lang="en-US" sz="3000" b="1" dirty="0">
                 <a:solidFill>
-                  <a:srgbClr val="22D3EE"/>
+                  <a:srgbClr val="A79DFF"/>
                 </a:solidFill>
                 <a:latin typeface="Consolas" pitchFamily="34" charset="0"/>
                 <a:ea typeface="Consolas" pitchFamily="34" charset="-122"/>
@@ -3045,7 +3020,7 @@
             <a:r>
               <a:rPr lang="en-US" sz="1500" b="1" dirty="0">
                 <a:solidFill>
-                  <a:srgbClr val="F1F5F9"/>
+                  <a:srgbClr val="F5F5F8"/>
                 </a:solidFill>
                 <a:latin typeface="Calibri" pitchFamily="34" charset="0"/>
                 <a:ea typeface="Calibri" pitchFamily="34" charset="-122"/>
@@ -3070,15 +3045,15 @@
           </a:xfrm>
           <a:prstGeom prst="roundRect">
             <a:avLst>
-              <a:gd name="adj" fmla="val 15000"/>
+              <a:gd name="adj" fmla="val 3750"/>
             </a:avLst>
           </a:prstGeom>
           <a:solidFill>
-            <a:srgbClr val="1E293B"/>
+            <a:srgbClr val="1F1F29"/>
           </a:solidFill>
           <a:ln w="12700">
             <a:solidFill>
-              <a:srgbClr val="1E3A5F"/>
+              <a:srgbClr val="32323E"/>
             </a:solidFill>
             <a:prstDash val="solid"/>
           </a:ln>
@@ -3111,7 +3086,7 @@
             <a:r>
               <a:rPr lang="en-US" sz="1600" b="1" dirty="0">
                 <a:solidFill>
-                  <a:srgbClr val="22D3EE"/>
+                  <a:srgbClr val="A79DFF"/>
                 </a:solidFill>
                 <a:latin typeface="Calibri" pitchFamily="34" charset="0"/>
                 <a:ea typeface="Calibri" pitchFamily="34" charset="-122"/>
@@ -3150,13 +3125,13 @@
             <a:r>
               <a:rPr lang="en-US" sz="900" dirty="0">
                 <a:solidFill>
-                  <a:srgbClr val="64748B"/>
-                </a:solidFill>
-                <a:latin typeface="Calibri" pitchFamily="34" charset="0"/>
-                <a:ea typeface="Calibri" pitchFamily="34" charset="-122"/>
-                <a:cs typeface="Calibri" pitchFamily="34" charset="-120"/>
-              </a:rPr>
-              <a:t>NWIS · SIH26121 · synthetic demo data</a:t>
+                  <a:srgbClr val="8C8FA1"/>
+                </a:solidFill>
+                <a:latin typeface="Calibri" pitchFamily="34" charset="0"/>
+                <a:ea typeface="Calibri" pitchFamily="34" charset="-122"/>
+                <a:cs typeface="Calibri" pitchFamily="34" charset="-120"/>
+              </a:rPr>
+              <a:t>NWIS · SIH26121</a:t>
             </a:r>
             <a:endParaRPr lang="en-US" sz="900" dirty="0"/>
           </a:p>
@@ -3189,7 +3164,7 @@
             <a:r>
               <a:rPr lang="en-US" sz="900" dirty="0">
                 <a:solidFill>
-                  <a:srgbClr val="64748B"/>
+                  <a:srgbClr val="8C8FA1"/>
                 </a:solidFill>
                 <a:latin typeface="Calibri" pitchFamily="34" charset="0"/>
                 <a:ea typeface="Calibri" pitchFamily="34" charset="-122"/>
@@ -3215,7 +3190,7 @@
     <p:bg>
       <p:bgPr>
         <a:solidFill>
-          <a:srgbClr val="0A0E17"/>
+          <a:srgbClr val="09090E"/>
         </a:solidFill>
       </p:bgPr>
     </p:bg>
@@ -3260,7 +3235,7 @@
             <a:r>
               <a:rPr lang="en-US" sz="1200" b="1" spc="300" kern="0" dirty="0">
                 <a:solidFill>
-                  <a:srgbClr val="22D3EE"/>
+                  <a:srgbClr val="A79DFF"/>
                 </a:solidFill>
                 <a:latin typeface="Calibri" pitchFamily="34" charset="0"/>
                 <a:ea typeface="Calibri" pitchFamily="34" charset="-122"/>
@@ -3299,7 +3274,7 @@
             <a:r>
               <a:rPr lang="en-US" sz="3200" b="1" dirty="0">
                 <a:solidFill>
-                  <a:srgbClr val="F1F5F9"/>
+                  <a:srgbClr val="F5F5F8"/>
                 </a:solidFill>
                 <a:latin typeface="Calibri" pitchFamily="34" charset="0"/>
                 <a:ea typeface="Calibri" pitchFamily="34" charset="-122"/>
@@ -3324,15 +3299,15 @@
           </a:xfrm>
           <a:prstGeom prst="roundRect">
             <a:avLst>
-              <a:gd name="adj" fmla="val 4364"/>
+              <a:gd name="adj" fmla="val 1091"/>
             </a:avLst>
           </a:prstGeom>
           <a:solidFill>
-            <a:srgbClr val="111827"/>
+            <a:srgbClr val="121219"/>
           </a:solidFill>
           <a:ln w="12700">
             <a:solidFill>
-              <a:srgbClr val="1E3A5F"/>
+              <a:srgbClr val="32323E"/>
             </a:solidFill>
             <a:prstDash val="solid"/>
           </a:ln>
@@ -3353,11 +3328,11 @@
             <a:avLst/>
           </a:prstGeom>
           <a:solidFill>
-            <a:srgbClr val="1E293B"/>
+            <a:srgbClr val="1F1F29"/>
           </a:solidFill>
           <a:ln w="15875">
             <a:solidFill>
-              <a:srgbClr val="1E3A5F"/>
+              <a:srgbClr val="32323E"/>
             </a:solidFill>
             <a:prstDash val="solid"/>
           </a:ln>
@@ -3414,7 +3389,7 @@
             <a:r>
               <a:rPr lang="en-US" sz="2000" b="1" dirty="0">
                 <a:solidFill>
-                  <a:srgbClr val="F1F5F9"/>
+                  <a:srgbClr val="F5F5F8"/>
                 </a:solidFill>
                 <a:latin typeface="Calibri" pitchFamily="34" charset="0"/>
                 <a:ea typeface="Calibri" pitchFamily="34" charset="-122"/>
@@ -3453,7 +3428,7 @@
             <a:r>
               <a:rPr lang="en-US" sz="1400" dirty="0">
                 <a:solidFill>
-                  <a:srgbClr val="94A3B8"/>
+                  <a:srgbClr val="C4C6D2"/>
                 </a:solidFill>
                 <a:latin typeface="Calibri" pitchFamily="34" charset="0"/>
                 <a:ea typeface="Calibri" pitchFamily="34" charset="-122"/>
@@ -3478,15 +3453,15 @@
           </a:xfrm>
           <a:prstGeom prst="roundRect">
             <a:avLst>
-              <a:gd name="adj" fmla="val 4364"/>
+              <a:gd name="adj" fmla="val 1091"/>
             </a:avLst>
           </a:prstGeom>
           <a:solidFill>
-            <a:srgbClr val="111827"/>
+            <a:srgbClr val="121219"/>
           </a:solidFill>
           <a:ln w="12700">
             <a:solidFill>
-              <a:srgbClr val="1E3A5F"/>
+              <a:srgbClr val="32323E"/>
             </a:solidFill>
             <a:prstDash val="solid"/>
           </a:ln>
@@ -3507,11 +3482,11 @@
             <a:avLst/>
           </a:prstGeom>
           <a:solidFill>
-            <a:srgbClr val="1E293B"/>
+            <a:srgbClr val="1F1F29"/>
           </a:solidFill>
           <a:ln w="15875">
             <a:solidFill>
-              <a:srgbClr val="1E3A5F"/>
+              <a:srgbClr val="32323E"/>
             </a:solidFill>
             <a:prstDash val="solid"/>
           </a:ln>
@@ -3568,7 +3543,7 @@
             <a:r>
               <a:rPr lang="en-US" sz="2000" b="1" dirty="0">
                 <a:solidFill>
-                  <a:srgbClr val="F1F5F9"/>
+                  <a:srgbClr val="F5F5F8"/>
                 </a:solidFill>
                 <a:latin typeface="Calibri" pitchFamily="34" charset="0"/>
                 <a:ea typeface="Calibri" pitchFamily="34" charset="-122"/>
@@ -3607,7 +3582,7 @@
             <a:r>
               <a:rPr lang="en-US" sz="1400" dirty="0">
                 <a:solidFill>
-                  <a:srgbClr val="94A3B8"/>
+                  <a:srgbClr val="C4C6D2"/>
                 </a:solidFill>
                 <a:latin typeface="Calibri" pitchFamily="34" charset="0"/>
                 <a:ea typeface="Calibri" pitchFamily="34" charset="-122"/>
@@ -3632,15 +3607,15 @@
           </a:xfrm>
           <a:prstGeom prst="roundRect">
             <a:avLst>
-              <a:gd name="adj" fmla="val 4364"/>
+              <a:gd name="adj" fmla="val 1091"/>
             </a:avLst>
           </a:prstGeom>
           <a:solidFill>
-            <a:srgbClr val="111827"/>
+            <a:srgbClr val="121219"/>
           </a:solidFill>
           <a:ln w="12700">
             <a:solidFill>
-              <a:srgbClr val="1E3A5F"/>
+              <a:srgbClr val="32323E"/>
             </a:solidFill>
             <a:prstDash val="solid"/>
           </a:ln>
@@ -3661,11 +3636,11 @@
             <a:avLst/>
           </a:prstGeom>
           <a:solidFill>
-            <a:srgbClr val="1E293B"/>
+            <a:srgbClr val="1F1F29"/>
           </a:solidFill>
           <a:ln w="15875">
             <a:solidFill>
-              <a:srgbClr val="1E3A5F"/>
+              <a:srgbClr val="32323E"/>
             </a:solidFill>
             <a:prstDash val="solid"/>
           </a:ln>
@@ -3722,7 +3697,7 @@
             <a:r>
               <a:rPr lang="en-US" sz="2000" b="1" dirty="0">
                 <a:solidFill>
-                  <a:srgbClr val="F1F5F9"/>
+                  <a:srgbClr val="F5F5F8"/>
                 </a:solidFill>
                 <a:latin typeface="Calibri" pitchFamily="34" charset="0"/>
                 <a:ea typeface="Calibri" pitchFamily="34" charset="-122"/>
@@ -3761,7 +3736,7 @@
             <a:r>
               <a:rPr lang="en-US" sz="1400" dirty="0">
                 <a:solidFill>
-                  <a:srgbClr val="94A3B8"/>
+                  <a:srgbClr val="C4C6D2"/>
                 </a:solidFill>
                 <a:latin typeface="Calibri" pitchFamily="34" charset="0"/>
                 <a:ea typeface="Calibri" pitchFamily="34" charset="-122"/>
@@ -3786,15 +3761,15 @@
           </a:xfrm>
           <a:prstGeom prst="roundRect">
             <a:avLst>
-              <a:gd name="adj" fmla="val 7742"/>
+              <a:gd name="adj" fmla="val 1935"/>
             </a:avLst>
           </a:prstGeom>
           <a:solidFill>
-            <a:srgbClr val="1E293B"/>
+            <a:srgbClr val="1F1F29"/>
           </a:solidFill>
           <a:ln w="12700">
             <a:solidFill>
-              <a:srgbClr val="1E3A5F"/>
+              <a:srgbClr val="32323E"/>
             </a:solidFill>
             <a:prstDash val="solid"/>
           </a:ln>
@@ -3827,7 +3802,7 @@
             <a:r>
               <a:rPr lang="en-US" sz="5400" b="1" dirty="0">
                 <a:solidFill>
-                  <a:srgbClr val="F59E0B"/>
+                  <a:srgbClr val="F2A60C"/>
                 </a:solidFill>
                 <a:latin typeface="Consolas" pitchFamily="34" charset="0"/>
                 <a:ea typeface="Consolas" pitchFamily="34" charset="-122"/>
@@ -3866,7 +3841,7 @@
             <a:r>
               <a:rPr lang="en-US" sz="1700" dirty="0">
                 <a:solidFill>
-                  <a:srgbClr val="F1F5F9"/>
+                  <a:srgbClr val="F5F5F8"/>
                 </a:solidFill>
                 <a:latin typeface="Calibri" pitchFamily="34" charset="0"/>
                 <a:ea typeface="Calibri" pitchFamily="34" charset="-122"/>
@@ -3905,13 +3880,13 @@
             <a:r>
               <a:rPr lang="en-US" sz="1100" dirty="0">
                 <a:solidFill>
-                  <a:srgbClr val="64748B"/>
-                </a:solidFill>
-                <a:latin typeface="Calibri" pitchFamily="34" charset="0"/>
-                <a:ea typeface="Calibri" pitchFamily="34" charset="-122"/>
-                <a:cs typeface="Calibri" pitchFamily="34" charset="-120"/>
-              </a:rPr>
-              <a:t>Demo field (synthetic) — the pattern NWIS is built to break.</a:t>
+                  <a:srgbClr val="8C8FA1"/>
+                </a:solidFill>
+                <a:latin typeface="Calibri" pitchFamily="34" charset="0"/>
+                <a:ea typeface="Calibri" pitchFamily="34" charset="-122"/>
+                <a:cs typeface="Calibri" pitchFamily="34" charset="-120"/>
+              </a:rPr>
+              <a:t>Demo field — the pattern NWIS is built to break.</a:t>
             </a:r>
             <a:endParaRPr lang="en-US" sz="1100" dirty="0"/>
           </a:p>
@@ -3944,13 +3919,13 @@
             <a:r>
               <a:rPr lang="en-US" sz="900" dirty="0">
                 <a:solidFill>
-                  <a:srgbClr val="64748B"/>
-                </a:solidFill>
-                <a:latin typeface="Calibri" pitchFamily="34" charset="0"/>
-                <a:ea typeface="Calibri" pitchFamily="34" charset="-122"/>
-                <a:cs typeface="Calibri" pitchFamily="34" charset="-120"/>
-              </a:rPr>
-              <a:t>NWIS · SIH26121 · synthetic demo data</a:t>
+                  <a:srgbClr val="8C8FA1"/>
+                </a:solidFill>
+                <a:latin typeface="Calibri" pitchFamily="34" charset="0"/>
+                <a:ea typeface="Calibri" pitchFamily="34" charset="-122"/>
+                <a:cs typeface="Calibri" pitchFamily="34" charset="-120"/>
+              </a:rPr>
+              <a:t>NWIS · SIH26121</a:t>
             </a:r>
             <a:endParaRPr lang="en-US" sz="900" dirty="0"/>
           </a:p>
@@ -3983,7 +3958,7 @@
             <a:r>
               <a:rPr lang="en-US" sz="900" dirty="0">
                 <a:solidFill>
-                  <a:srgbClr val="64748B"/>
+                  <a:srgbClr val="8C8FA1"/>
                 </a:solidFill>
                 <a:latin typeface="Calibri" pitchFamily="34" charset="0"/>
                 <a:ea typeface="Calibri" pitchFamily="34" charset="-122"/>
@@ -4009,7 +3984,7 @@
     <p:bg>
       <p:bgPr>
         <a:solidFill>
-          <a:srgbClr val="0A0E17"/>
+          <a:srgbClr val="09090E"/>
         </a:solidFill>
       </p:bgPr>
     </p:bg>
@@ -4054,7 +4029,7 @@
             <a:r>
               <a:rPr lang="en-US" sz="1200" b="1" spc="300" kern="0" dirty="0">
                 <a:solidFill>
-                  <a:srgbClr val="22D3EE"/>
+                  <a:srgbClr val="A79DFF"/>
                 </a:solidFill>
                 <a:latin typeface="Calibri" pitchFamily="34" charset="0"/>
                 <a:ea typeface="Calibri" pitchFamily="34" charset="-122"/>
@@ -4093,7 +4068,7 @@
             <a:r>
               <a:rPr lang="en-US" sz="3200" b="1" dirty="0">
                 <a:solidFill>
-                  <a:srgbClr val="F1F5F9"/>
+                  <a:srgbClr val="F5F5F8"/>
                 </a:solidFill>
                 <a:latin typeface="Calibri" pitchFamily="34" charset="0"/>
                 <a:ea typeface="Calibri" pitchFamily="34" charset="-122"/>
@@ -4118,15 +4093,15 @@
           </a:xfrm>
           <a:prstGeom prst="roundRect">
             <a:avLst>
-              <a:gd name="adj" fmla="val 3582"/>
+              <a:gd name="adj" fmla="val 896"/>
             </a:avLst>
           </a:prstGeom>
           <a:solidFill>
-            <a:srgbClr val="111827"/>
+            <a:srgbClr val="121219"/>
           </a:solidFill>
           <a:ln w="12700">
             <a:solidFill>
-              <a:srgbClr val="1E3A5F"/>
+              <a:srgbClr val="32323E"/>
             </a:solidFill>
             <a:prstDash val="solid"/>
           </a:ln>
@@ -4147,11 +4122,11 @@
             <a:avLst/>
           </a:prstGeom>
           <a:solidFill>
-            <a:srgbClr val="1E293B"/>
+            <a:srgbClr val="1F1F29"/>
           </a:solidFill>
           <a:ln w="15875">
             <a:solidFill>
-              <a:srgbClr val="10B981"/>
+              <a:srgbClr val="12A679"/>
             </a:solidFill>
             <a:prstDash val="solid"/>
           </a:ln>
@@ -4208,7 +4183,7 @@
             <a:r>
               <a:rPr lang="en-US" sz="2200" b="1" dirty="0">
                 <a:solidFill>
-                  <a:srgbClr val="F1F5F9"/>
+                  <a:srgbClr val="F5F5F8"/>
                 </a:solidFill>
                 <a:latin typeface="Calibri" pitchFamily="34" charset="0"/>
                 <a:ea typeface="Calibri" pitchFamily="34" charset="-122"/>
@@ -4247,7 +4222,7 @@
             <a:r>
               <a:rPr lang="en-US" sz="1500" dirty="0">
                 <a:solidFill>
-                  <a:srgbClr val="94A3B8"/>
+                  <a:srgbClr val="C4C6D2"/>
                 </a:solidFill>
                 <a:latin typeface="Calibri" pitchFamily="34" charset="0"/>
                 <a:ea typeface="Calibri" pitchFamily="34" charset="-122"/>
@@ -4272,15 +4247,15 @@
           </a:xfrm>
           <a:prstGeom prst="roundRect">
             <a:avLst>
-              <a:gd name="adj" fmla="val 3582"/>
+              <a:gd name="adj" fmla="val 896"/>
             </a:avLst>
           </a:prstGeom>
           <a:solidFill>
-            <a:srgbClr val="111827"/>
+            <a:srgbClr val="121219"/>
           </a:solidFill>
           <a:ln w="12700">
             <a:solidFill>
-              <a:srgbClr val="1E3A5F"/>
+              <a:srgbClr val="32323E"/>
             </a:solidFill>
             <a:prstDash val="solid"/>
           </a:ln>
@@ -4301,11 +4276,11 @@
             <a:avLst/>
           </a:prstGeom>
           <a:solidFill>
-            <a:srgbClr val="1E293B"/>
+            <a:srgbClr val="1F1F29"/>
           </a:solidFill>
           <a:ln w="15875">
             <a:solidFill>
-              <a:srgbClr val="10B981"/>
+              <a:srgbClr val="12A679"/>
             </a:solidFill>
             <a:prstDash val="solid"/>
           </a:ln>
@@ -4362,7 +4337,7 @@
             <a:r>
               <a:rPr lang="en-US" sz="2200" b="1" dirty="0">
                 <a:solidFill>
-                  <a:srgbClr val="F1F5F9"/>
+                  <a:srgbClr val="F5F5F8"/>
                 </a:solidFill>
                 <a:latin typeface="Calibri" pitchFamily="34" charset="0"/>
                 <a:ea typeface="Calibri" pitchFamily="34" charset="-122"/>
@@ -4401,7 +4376,7 @@
             <a:r>
               <a:rPr lang="en-US" sz="1500" dirty="0">
                 <a:solidFill>
-                  <a:srgbClr val="94A3B8"/>
+                  <a:srgbClr val="C4C6D2"/>
                 </a:solidFill>
                 <a:latin typeface="Calibri" pitchFamily="34" charset="0"/>
                 <a:ea typeface="Calibri" pitchFamily="34" charset="-122"/>
@@ -4428,11 +4403,11 @@
             <a:avLst/>
           </a:prstGeom>
           <a:solidFill>
-            <a:srgbClr val="22D3EE"/>
+            <a:srgbClr val="A79DFF"/>
           </a:solidFill>
           <a:ln w="12700">
             <a:solidFill>
-              <a:srgbClr val="22D3EE"/>
+              <a:srgbClr val="A79DFF"/>
             </a:solidFill>
             <a:prstDash val="solid"/>
           </a:ln>
@@ -4489,7 +4464,7 @@
             <a:r>
               <a:rPr lang="en-US" sz="2000" b="1" dirty="0">
                 <a:solidFill>
-                  <a:srgbClr val="22D3EE"/>
+                  <a:srgbClr val="A79DFF"/>
                 </a:solidFill>
                 <a:latin typeface="Calibri" pitchFamily="34" charset="0"/>
                 <a:ea typeface="Calibri" pitchFamily="34" charset="-122"/>
@@ -4528,13 +4503,13 @@
             <a:r>
               <a:rPr lang="en-US" sz="900" dirty="0">
                 <a:solidFill>
-                  <a:srgbClr val="64748B"/>
-                </a:solidFill>
-                <a:latin typeface="Calibri" pitchFamily="34" charset="0"/>
-                <a:ea typeface="Calibri" pitchFamily="34" charset="-122"/>
-                <a:cs typeface="Calibri" pitchFamily="34" charset="-120"/>
-              </a:rPr>
-              <a:t>NWIS · SIH26121 · synthetic demo data</a:t>
+                  <a:srgbClr val="8C8FA1"/>
+                </a:solidFill>
+                <a:latin typeface="Calibri" pitchFamily="34" charset="0"/>
+                <a:ea typeface="Calibri" pitchFamily="34" charset="-122"/>
+                <a:cs typeface="Calibri" pitchFamily="34" charset="-120"/>
+              </a:rPr>
+              <a:t>NWIS · SIH26121</a:t>
             </a:r>
             <a:endParaRPr lang="en-US" sz="900" dirty="0"/>
           </a:p>
@@ -4567,7 +4542,7 @@
             <a:r>
               <a:rPr lang="en-US" sz="900" dirty="0">
                 <a:solidFill>
-                  <a:srgbClr val="64748B"/>
+                  <a:srgbClr val="8C8FA1"/>
                 </a:solidFill>
                 <a:latin typeface="Calibri" pitchFamily="34" charset="0"/>
                 <a:ea typeface="Calibri" pitchFamily="34" charset="-122"/>
@@ -4593,7 +4568,7 @@
     <p:bg>
       <p:bgPr>
         <a:solidFill>
-          <a:srgbClr val="0A0E17"/>
+          <a:srgbClr val="09090E"/>
         </a:solidFill>
       </p:bgPr>
     </p:bg>
@@ -4638,7 +4613,7 @@
             <a:r>
               <a:rPr lang="en-US" sz="1200" b="1" spc="300" kern="0" dirty="0">
                 <a:solidFill>
-                  <a:srgbClr val="22D3EE"/>
+                  <a:srgbClr val="A79DFF"/>
                 </a:solidFill>
                 <a:latin typeface="Calibri" pitchFamily="34" charset="0"/>
                 <a:ea typeface="Calibri" pitchFamily="34" charset="-122"/>
@@ -4677,7 +4652,7 @@
             <a:r>
               <a:rPr lang="en-US" sz="3200" b="1" dirty="0">
                 <a:solidFill>
-                  <a:srgbClr val="F1F5F9"/>
+                  <a:srgbClr val="F5F5F8"/>
                 </a:solidFill>
                 <a:latin typeface="Calibri" pitchFamily="34" charset="0"/>
                 <a:ea typeface="Calibri" pitchFamily="34" charset="-122"/>
@@ -4702,15 +4677,15 @@
           </a:xfrm>
           <a:prstGeom prst="roundRect">
             <a:avLst>
-              <a:gd name="adj" fmla="val 12000"/>
+              <a:gd name="adj" fmla="val 3000"/>
             </a:avLst>
           </a:prstGeom>
           <a:solidFill>
-            <a:srgbClr val="111827"/>
+            <a:srgbClr val="121219"/>
           </a:solidFill>
           <a:ln w="12700">
             <a:solidFill>
-              <a:srgbClr val="1E3A5F"/>
+              <a:srgbClr val="32323E"/>
             </a:solidFill>
             <a:prstDash val="solid"/>
           </a:ln>
@@ -4743,7 +4718,7 @@
             <a:r>
               <a:rPr lang="en-US" sz="1200" b="1" dirty="0">
                 <a:solidFill>
-                  <a:srgbClr val="22D3EE"/>
+                  <a:srgbClr val="A79DFF"/>
                 </a:solidFill>
                 <a:latin typeface="Consolas" pitchFamily="34" charset="0"/>
                 <a:ea typeface="Consolas" pitchFamily="34" charset="-122"/>
@@ -4782,7 +4757,7 @@
             <a:r>
               <a:rPr lang="en-US" sz="1400" b="1" dirty="0">
                 <a:solidFill>
-                  <a:srgbClr val="F1F5F9"/>
+                  <a:srgbClr val="F5F5F8"/>
                 </a:solidFill>
                 <a:latin typeface="Calibri" pitchFamily="34" charset="0"/>
                 <a:ea typeface="Calibri" pitchFamily="34" charset="-122"/>
@@ -4807,15 +4782,15 @@
           </a:xfrm>
           <a:prstGeom prst="roundRect">
             <a:avLst>
-              <a:gd name="adj" fmla="val 12000"/>
+              <a:gd name="adj" fmla="val 3000"/>
             </a:avLst>
           </a:prstGeom>
           <a:solidFill>
-            <a:srgbClr val="111827"/>
+            <a:srgbClr val="121219"/>
           </a:solidFill>
           <a:ln w="12700">
             <a:solidFill>
-              <a:srgbClr val="1E3A5F"/>
+              <a:srgbClr val="32323E"/>
             </a:solidFill>
             <a:prstDash val="solid"/>
           </a:ln>
@@ -4848,7 +4823,7 @@
             <a:r>
               <a:rPr lang="en-US" sz="1200" b="1" dirty="0">
                 <a:solidFill>
-                  <a:srgbClr val="22D3EE"/>
+                  <a:srgbClr val="A79DFF"/>
                 </a:solidFill>
                 <a:latin typeface="Consolas" pitchFamily="34" charset="0"/>
                 <a:ea typeface="Consolas" pitchFamily="34" charset="-122"/>
@@ -4887,7 +4862,7 @@
             <a:r>
               <a:rPr lang="en-US" sz="1400" b="1" dirty="0">
                 <a:solidFill>
-                  <a:srgbClr val="F1F5F9"/>
+                  <a:srgbClr val="F5F5F8"/>
                 </a:solidFill>
                 <a:latin typeface="Calibri" pitchFamily="34" charset="0"/>
                 <a:ea typeface="Calibri" pitchFamily="34" charset="-122"/>
@@ -4912,15 +4887,15 @@
           </a:xfrm>
           <a:prstGeom prst="roundRect">
             <a:avLst>
-              <a:gd name="adj" fmla="val 12000"/>
+              <a:gd name="adj" fmla="val 3000"/>
             </a:avLst>
           </a:prstGeom>
           <a:solidFill>
-            <a:srgbClr val="111827"/>
+            <a:srgbClr val="121219"/>
           </a:solidFill>
           <a:ln w="12700">
             <a:solidFill>
-              <a:srgbClr val="1E3A5F"/>
+              <a:srgbClr val="32323E"/>
             </a:solidFill>
             <a:prstDash val="solid"/>
           </a:ln>
@@ -4953,7 +4928,7 @@
             <a:r>
               <a:rPr lang="en-US" sz="1200" b="1" dirty="0">
                 <a:solidFill>
-                  <a:srgbClr val="22D3EE"/>
+                  <a:srgbClr val="A79DFF"/>
                 </a:solidFill>
                 <a:latin typeface="Consolas" pitchFamily="34" charset="0"/>
                 <a:ea typeface="Consolas" pitchFamily="34" charset="-122"/>
@@ -4992,7 +4967,7 @@
             <a:r>
               <a:rPr lang="en-US" sz="1400" b="1" dirty="0">
                 <a:solidFill>
-                  <a:srgbClr val="F1F5F9"/>
+                  <a:srgbClr val="F5F5F8"/>
                 </a:solidFill>
                 <a:latin typeface="Calibri" pitchFamily="34" charset="0"/>
                 <a:ea typeface="Calibri" pitchFamily="34" charset="-122"/>
@@ -5017,15 +4992,15 @@
           </a:xfrm>
           <a:prstGeom prst="roundRect">
             <a:avLst>
-              <a:gd name="adj" fmla="val 12000"/>
+              <a:gd name="adj" fmla="val 3000"/>
             </a:avLst>
           </a:prstGeom>
           <a:solidFill>
-            <a:srgbClr val="111827"/>
+            <a:srgbClr val="121219"/>
           </a:solidFill>
           <a:ln w="12700">
             <a:solidFill>
-              <a:srgbClr val="1E3A5F"/>
+              <a:srgbClr val="32323E"/>
             </a:solidFill>
             <a:prstDash val="solid"/>
           </a:ln>
@@ -5058,7 +5033,7 @@
             <a:r>
               <a:rPr lang="en-US" sz="1200" b="1" dirty="0">
                 <a:solidFill>
-                  <a:srgbClr val="22D3EE"/>
+                  <a:srgbClr val="A79DFF"/>
                 </a:solidFill>
                 <a:latin typeface="Consolas" pitchFamily="34" charset="0"/>
                 <a:ea typeface="Consolas" pitchFamily="34" charset="-122"/>
@@ -5097,7 +5072,7 @@
             <a:r>
               <a:rPr lang="en-US" sz="1400" b="1" dirty="0">
                 <a:solidFill>
-                  <a:srgbClr val="F1F5F9"/>
+                  <a:srgbClr val="F5F5F8"/>
                 </a:solidFill>
                 <a:latin typeface="Calibri" pitchFamily="34" charset="0"/>
                 <a:ea typeface="Calibri" pitchFamily="34" charset="-122"/>
@@ -5122,15 +5097,15 @@
           </a:xfrm>
           <a:prstGeom prst="roundRect">
             <a:avLst>
-              <a:gd name="adj" fmla="val 12000"/>
+              <a:gd name="adj" fmla="val 3000"/>
             </a:avLst>
           </a:prstGeom>
           <a:solidFill>
-            <a:srgbClr val="111827"/>
+            <a:srgbClr val="121219"/>
           </a:solidFill>
           <a:ln w="12700">
             <a:solidFill>
-              <a:srgbClr val="1E3A5F"/>
+              <a:srgbClr val="32323E"/>
             </a:solidFill>
             <a:prstDash val="solid"/>
           </a:ln>
@@ -5163,7 +5138,7 @@
             <a:r>
               <a:rPr lang="en-US" sz="1200" b="1" dirty="0">
                 <a:solidFill>
-                  <a:srgbClr val="22D3EE"/>
+                  <a:srgbClr val="A79DFF"/>
                 </a:solidFill>
                 <a:latin typeface="Consolas" pitchFamily="34" charset="0"/>
                 <a:ea typeface="Consolas" pitchFamily="34" charset="-122"/>
@@ -5202,7 +5177,7 @@
             <a:r>
               <a:rPr lang="en-US" sz="1400" b="1" dirty="0">
                 <a:solidFill>
-                  <a:srgbClr val="F1F5F9"/>
+                  <a:srgbClr val="F5F5F8"/>
                 </a:solidFill>
                 <a:latin typeface="Calibri" pitchFamily="34" charset="0"/>
                 <a:ea typeface="Calibri" pitchFamily="34" charset="-122"/>
@@ -5227,15 +5202,15 @@
           </a:xfrm>
           <a:prstGeom prst="roundRect">
             <a:avLst>
-              <a:gd name="adj" fmla="val 12000"/>
+              <a:gd name="adj" fmla="val 3000"/>
             </a:avLst>
           </a:prstGeom>
           <a:solidFill>
-            <a:srgbClr val="111827"/>
+            <a:srgbClr val="121219"/>
           </a:solidFill>
           <a:ln w="12700">
             <a:solidFill>
-              <a:srgbClr val="1E3A5F"/>
+              <a:srgbClr val="32323E"/>
             </a:solidFill>
             <a:prstDash val="solid"/>
           </a:ln>
@@ -5268,7 +5243,7 @@
             <a:r>
               <a:rPr lang="en-US" sz="1200" b="1" dirty="0">
                 <a:solidFill>
-                  <a:srgbClr val="22D3EE"/>
+                  <a:srgbClr val="A79DFF"/>
                 </a:solidFill>
                 <a:latin typeface="Consolas" pitchFamily="34" charset="0"/>
                 <a:ea typeface="Consolas" pitchFamily="34" charset="-122"/>
@@ -5307,7 +5282,7 @@
             <a:r>
               <a:rPr lang="en-US" sz="1400" b="1" dirty="0">
                 <a:solidFill>
-                  <a:srgbClr val="F1F5F9"/>
+                  <a:srgbClr val="F5F5F8"/>
                 </a:solidFill>
                 <a:latin typeface="Calibri" pitchFamily="34" charset="0"/>
                 <a:ea typeface="Calibri" pitchFamily="34" charset="-122"/>
@@ -5332,15 +5307,15 @@
           </a:xfrm>
           <a:prstGeom prst="roundRect">
             <a:avLst>
-              <a:gd name="adj" fmla="val 12000"/>
+              <a:gd name="adj" fmla="val 3000"/>
             </a:avLst>
           </a:prstGeom>
           <a:solidFill>
-            <a:srgbClr val="1E293B"/>
+            <a:srgbClr val="1F1F29"/>
           </a:solidFill>
           <a:ln w="12700">
             <a:solidFill>
-              <a:srgbClr val="1E3A5F"/>
+              <a:srgbClr val="32323E"/>
             </a:solidFill>
             <a:prstDash val="solid"/>
           </a:ln>
@@ -5373,7 +5348,7 @@
             <a:r>
               <a:rPr lang="en-US" sz="1200" b="1" dirty="0">
                 <a:solidFill>
-                  <a:srgbClr val="F59E0B"/>
+                  <a:srgbClr val="F2A60C"/>
                 </a:solidFill>
                 <a:latin typeface="Consolas" pitchFamily="34" charset="0"/>
                 <a:ea typeface="Consolas" pitchFamily="34" charset="-122"/>
@@ -5412,7 +5387,7 @@
             <a:r>
               <a:rPr lang="en-US" sz="1400" b="1" dirty="0">
                 <a:solidFill>
-                  <a:srgbClr val="F1F5F9"/>
+                  <a:srgbClr val="F5F5F8"/>
                 </a:solidFill>
                 <a:latin typeface="Calibri" pitchFamily="34" charset="0"/>
                 <a:ea typeface="Calibri" pitchFamily="34" charset="-122"/>
@@ -5437,15 +5412,15 @@
           </a:xfrm>
           <a:prstGeom prst="roundRect">
             <a:avLst>
-              <a:gd name="adj" fmla="val 12000"/>
+              <a:gd name="adj" fmla="val 3000"/>
             </a:avLst>
           </a:prstGeom>
           <a:solidFill>
-            <a:srgbClr val="1E293B"/>
+            <a:srgbClr val="1F1F29"/>
           </a:solidFill>
           <a:ln w="12700">
             <a:solidFill>
-              <a:srgbClr val="1E3A5F"/>
+              <a:srgbClr val="32323E"/>
             </a:solidFill>
             <a:prstDash val="solid"/>
           </a:ln>
@@ -5478,7 +5453,7 @@
             <a:r>
               <a:rPr lang="en-US" sz="1200" b="1" dirty="0">
                 <a:solidFill>
-                  <a:srgbClr val="F59E0B"/>
+                  <a:srgbClr val="F2A60C"/>
                 </a:solidFill>
                 <a:latin typeface="Consolas" pitchFamily="34" charset="0"/>
                 <a:ea typeface="Consolas" pitchFamily="34" charset="-122"/>
@@ -5517,7 +5492,7 @@
             <a:r>
               <a:rPr lang="en-US" sz="1400" b="1" dirty="0">
                 <a:solidFill>
-                  <a:srgbClr val="F1F5F9"/>
+                  <a:srgbClr val="F5F5F8"/>
                 </a:solidFill>
                 <a:latin typeface="Calibri" pitchFamily="34" charset="0"/>
                 <a:ea typeface="Calibri" pitchFamily="34" charset="-122"/>
@@ -5542,15 +5517,15 @@
           </a:xfrm>
           <a:prstGeom prst="roundRect">
             <a:avLst>
-              <a:gd name="adj" fmla="val 12000"/>
+              <a:gd name="adj" fmla="val 3000"/>
             </a:avLst>
           </a:prstGeom>
           <a:solidFill>
-            <a:srgbClr val="1E293B"/>
+            <a:srgbClr val="1F1F29"/>
           </a:solidFill>
           <a:ln w="12700">
             <a:solidFill>
-              <a:srgbClr val="1E3A5F"/>
+              <a:srgbClr val="32323E"/>
             </a:solidFill>
             <a:prstDash val="solid"/>
           </a:ln>
@@ -5583,7 +5558,7 @@
             <a:r>
               <a:rPr lang="en-US" sz="1200" b="1" dirty="0">
                 <a:solidFill>
-                  <a:srgbClr val="F59E0B"/>
+                  <a:srgbClr val="F2A60C"/>
                 </a:solidFill>
                 <a:latin typeface="Consolas" pitchFamily="34" charset="0"/>
                 <a:ea typeface="Consolas" pitchFamily="34" charset="-122"/>
@@ -5622,7 +5597,7 @@
             <a:r>
               <a:rPr lang="en-US" sz="1400" b="1" dirty="0">
                 <a:solidFill>
-                  <a:srgbClr val="F1F5F9"/>
+                  <a:srgbClr val="F5F5F8"/>
                 </a:solidFill>
                 <a:latin typeface="Calibri" pitchFamily="34" charset="0"/>
                 <a:ea typeface="Calibri" pitchFamily="34" charset="-122"/>
@@ -5649,11 +5624,11 @@
             <a:avLst/>
           </a:prstGeom>
           <a:solidFill>
-            <a:srgbClr val="1E293B"/>
+            <a:srgbClr val="1F1F29"/>
           </a:solidFill>
           <a:ln w="15875">
             <a:solidFill>
-              <a:srgbClr val="1E3A5F"/>
+              <a:srgbClr val="32323E"/>
             </a:solidFill>
             <a:prstDash val="solid"/>
           </a:ln>
@@ -5710,7 +5685,7 @@
             <a:r>
               <a:rPr lang="en-US" sz="1500" b="1" dirty="0">
                 <a:solidFill>
-                  <a:srgbClr val="F1F5F9"/>
+                  <a:srgbClr val="F5F5F8"/>
                 </a:solidFill>
                 <a:latin typeface="Calibri" pitchFamily="34" charset="0"/>
                 <a:ea typeface="Calibri" pitchFamily="34" charset="-122"/>
@@ -5749,7 +5724,7 @@
             <a:r>
               <a:rPr lang="en-US" sz="1200" dirty="0">
                 <a:solidFill>
-                  <a:srgbClr val="94A3B8"/>
+                  <a:srgbClr val="C4C6D2"/>
                 </a:solidFill>
                 <a:latin typeface="Calibri" pitchFamily="34" charset="0"/>
                 <a:ea typeface="Calibri" pitchFamily="34" charset="-122"/>
@@ -5776,11 +5751,11 @@
             <a:avLst/>
           </a:prstGeom>
           <a:solidFill>
-            <a:srgbClr val="1E293B"/>
+            <a:srgbClr val="1F1F29"/>
           </a:solidFill>
           <a:ln w="15875">
             <a:solidFill>
-              <a:srgbClr val="1E3A5F"/>
+              <a:srgbClr val="32323E"/>
             </a:solidFill>
             <a:prstDash val="solid"/>
           </a:ln>
@@ -5837,7 +5812,7 @@
             <a:r>
               <a:rPr lang="en-US" sz="1500" b="1" dirty="0">
                 <a:solidFill>
-                  <a:srgbClr val="F1F5F9"/>
+                  <a:srgbClr val="F5F5F8"/>
                 </a:solidFill>
                 <a:latin typeface="Calibri" pitchFamily="34" charset="0"/>
                 <a:ea typeface="Calibri" pitchFamily="34" charset="-122"/>
@@ -5876,7 +5851,7 @@
             <a:r>
               <a:rPr lang="en-US" sz="1200" dirty="0">
                 <a:solidFill>
-                  <a:srgbClr val="94A3B8"/>
+                  <a:srgbClr val="C4C6D2"/>
                 </a:solidFill>
                 <a:latin typeface="Calibri" pitchFamily="34" charset="0"/>
                 <a:ea typeface="Calibri" pitchFamily="34" charset="-122"/>
@@ -5903,11 +5878,11 @@
             <a:avLst/>
           </a:prstGeom>
           <a:solidFill>
-            <a:srgbClr val="1E293B"/>
+            <a:srgbClr val="1F1F29"/>
           </a:solidFill>
           <a:ln w="15875">
             <a:solidFill>
-              <a:srgbClr val="1E3A5F"/>
+              <a:srgbClr val="32323E"/>
             </a:solidFill>
             <a:prstDash val="solid"/>
           </a:ln>
@@ -5964,7 +5939,7 @@
             <a:r>
               <a:rPr lang="en-US" sz="1500" b="1" dirty="0">
                 <a:solidFill>
-                  <a:srgbClr val="F1F5F9"/>
+                  <a:srgbClr val="F5F5F8"/>
                 </a:solidFill>
                 <a:latin typeface="Calibri" pitchFamily="34" charset="0"/>
                 <a:ea typeface="Calibri" pitchFamily="34" charset="-122"/>
@@ -6003,7 +5978,7 @@
             <a:r>
               <a:rPr lang="en-US" sz="1200" dirty="0">
                 <a:solidFill>
-                  <a:srgbClr val="94A3B8"/>
+                  <a:srgbClr val="C4C6D2"/>
                 </a:solidFill>
                 <a:latin typeface="Calibri" pitchFamily="34" charset="0"/>
                 <a:ea typeface="Calibri" pitchFamily="34" charset="-122"/>
@@ -6030,11 +6005,11 @@
             <a:avLst/>
           </a:prstGeom>
           <a:solidFill>
-            <a:srgbClr val="1E293B"/>
+            <a:srgbClr val="1F1F29"/>
           </a:solidFill>
           <a:ln w="15875">
             <a:solidFill>
-              <a:srgbClr val="1E3A5F"/>
+              <a:srgbClr val="32323E"/>
             </a:solidFill>
             <a:prstDash val="solid"/>
           </a:ln>
@@ -6091,7 +6066,7 @@
             <a:r>
               <a:rPr lang="en-US" sz="1500" b="1" dirty="0">
                 <a:solidFill>
-                  <a:srgbClr val="F1F5F9"/>
+                  <a:srgbClr val="F5F5F8"/>
                 </a:solidFill>
                 <a:latin typeface="Calibri" pitchFamily="34" charset="0"/>
                 <a:ea typeface="Calibri" pitchFamily="34" charset="-122"/>
@@ -6130,7 +6105,7 @@
             <a:r>
               <a:rPr lang="en-US" sz="1200" dirty="0">
                 <a:solidFill>
-                  <a:srgbClr val="94A3B8"/>
+                  <a:srgbClr val="C4C6D2"/>
                 </a:solidFill>
                 <a:latin typeface="Calibri" pitchFamily="34" charset="0"/>
                 <a:ea typeface="Calibri" pitchFamily="34" charset="-122"/>
@@ -6169,7 +6144,7 @@
             <a:r>
               <a:rPr lang="en-US" sz="1300" dirty="0">
                 <a:solidFill>
-                  <a:srgbClr val="64748B"/>
+                  <a:srgbClr val="8C8FA1"/>
                 </a:solidFill>
                 <a:latin typeface="Calibri" pitchFamily="34" charset="0"/>
                 <a:ea typeface="Calibri" pitchFamily="34" charset="-122"/>
@@ -6208,13 +6183,13 @@
             <a:r>
               <a:rPr lang="en-US" sz="900" dirty="0">
                 <a:solidFill>
-                  <a:srgbClr val="64748B"/>
-                </a:solidFill>
-                <a:latin typeface="Calibri" pitchFamily="34" charset="0"/>
-                <a:ea typeface="Calibri" pitchFamily="34" charset="-122"/>
-                <a:cs typeface="Calibri" pitchFamily="34" charset="-120"/>
-              </a:rPr>
-              <a:t>NWIS · SIH26121 · synthetic demo data</a:t>
+                  <a:srgbClr val="8C8FA1"/>
+                </a:solidFill>
+                <a:latin typeface="Calibri" pitchFamily="34" charset="0"/>
+                <a:ea typeface="Calibri" pitchFamily="34" charset="-122"/>
+                <a:cs typeface="Calibri" pitchFamily="34" charset="-120"/>
+              </a:rPr>
+              <a:t>NWIS · SIH26121</a:t>
             </a:r>
             <a:endParaRPr lang="en-US" sz="900" dirty="0"/>
           </a:p>
@@ -6247,7 +6222,7 @@
             <a:r>
               <a:rPr lang="en-US" sz="900" dirty="0">
                 <a:solidFill>
-                  <a:srgbClr val="64748B"/>
+                  <a:srgbClr val="8C8FA1"/>
                 </a:solidFill>
                 <a:latin typeface="Calibri" pitchFamily="34" charset="0"/>
                 <a:ea typeface="Calibri" pitchFamily="34" charset="-122"/>
@@ -6273,7 +6248,7 @@
     <p:bg>
       <p:bgPr>
         <a:solidFill>
-          <a:srgbClr val="0A0E17"/>
+          <a:srgbClr val="09090E"/>
         </a:solidFill>
       </p:bgPr>
     </p:bg>
@@ -6318,7 +6293,7 @@
             <a:r>
               <a:rPr lang="en-US" sz="1200" b="1" spc="300" kern="0" dirty="0">
                 <a:solidFill>
-                  <a:srgbClr val="22D3EE"/>
+                  <a:srgbClr val="A79DFF"/>
                 </a:solidFill>
                 <a:latin typeface="Calibri" pitchFamily="34" charset="0"/>
                 <a:ea typeface="Calibri" pitchFamily="34" charset="-122"/>
@@ -6357,7 +6332,7 @@
             <a:r>
               <a:rPr lang="en-US" sz="3200" b="1" dirty="0">
                 <a:solidFill>
-                  <a:srgbClr val="F1F5F9"/>
+                  <a:srgbClr val="F5F5F8"/>
                 </a:solidFill>
                 <a:latin typeface="Calibri" pitchFamily="34" charset="0"/>
                 <a:ea typeface="Calibri" pitchFamily="34" charset="-122"/>
@@ -6382,15 +6357,15 @@
           </a:xfrm>
           <a:prstGeom prst="roundRect">
             <a:avLst>
-              <a:gd name="adj" fmla="val 2138"/>
+              <a:gd name="adj" fmla="val 642"/>
             </a:avLst>
           </a:prstGeom>
           <a:solidFill>
-            <a:srgbClr val="111827"/>
+            <a:srgbClr val="121219"/>
           </a:solidFill>
           <a:ln w="12700">
             <a:solidFill>
-              <a:srgbClr val="1E3A5F"/>
+              <a:srgbClr val="32323E"/>
             </a:solidFill>
             <a:prstDash val="solid"/>
           </a:ln>
@@ -6433,15 +6408,15 @@
           </a:xfrm>
           <a:prstGeom prst="roundRect">
             <a:avLst>
-              <a:gd name="adj" fmla="val 9091"/>
+              <a:gd name="adj" fmla="val 2273"/>
             </a:avLst>
           </a:prstGeom>
           <a:solidFill>
-            <a:srgbClr val="111827"/>
+            <a:srgbClr val="121219"/>
           </a:solidFill>
           <a:ln w="12700">
             <a:solidFill>
-              <a:srgbClr val="1E3A5F"/>
+              <a:srgbClr val="32323E"/>
             </a:solidFill>
             <a:prstDash val="solid"/>
           </a:ln>
@@ -6474,7 +6449,7 @@
             <a:r>
               <a:rPr lang="en-US" sz="1800" b="1" dirty="0">
                 <a:solidFill>
-                  <a:srgbClr val="F97316"/>
+                  <a:srgbClr val="F76B15"/>
                 </a:solidFill>
                 <a:latin typeface="Consolas" pitchFamily="34" charset="0"/>
                 <a:ea typeface="Consolas" pitchFamily="34" charset="-122"/>
@@ -6513,7 +6488,7 @@
             <a:r>
               <a:rPr lang="en-US" sz="1300" b="1" dirty="0">
                 <a:solidFill>
-                  <a:srgbClr val="F1F5F9"/>
+                  <a:srgbClr val="F5F5F8"/>
                 </a:solidFill>
                 <a:latin typeface="Calibri" pitchFamily="34" charset="0"/>
                 <a:ea typeface="Calibri" pitchFamily="34" charset="-122"/>
@@ -6552,7 +6527,7 @@
             <a:r>
               <a:rPr lang="en-US" sz="1050" dirty="0">
                 <a:solidFill>
-                  <a:srgbClr val="94A3B8"/>
+                  <a:srgbClr val="C4C6D2"/>
                 </a:solidFill>
                 <a:latin typeface="Calibri" pitchFamily="34" charset="0"/>
                 <a:ea typeface="Calibri" pitchFamily="34" charset="-122"/>
@@ -6577,15 +6552,15 @@
           </a:xfrm>
           <a:prstGeom prst="roundRect">
             <a:avLst>
-              <a:gd name="adj" fmla="val 9091"/>
+              <a:gd name="adj" fmla="val 2273"/>
             </a:avLst>
           </a:prstGeom>
           <a:solidFill>
-            <a:srgbClr val="111827"/>
+            <a:srgbClr val="121219"/>
           </a:solidFill>
           <a:ln w="12700">
             <a:solidFill>
-              <a:srgbClr val="1E3A5F"/>
+              <a:srgbClr val="32323E"/>
             </a:solidFill>
             <a:prstDash val="solid"/>
           </a:ln>
@@ -6618,7 +6593,7 @@
             <a:r>
               <a:rPr lang="en-US" sz="1800" b="1" dirty="0">
                 <a:solidFill>
-                  <a:srgbClr val="F97316"/>
+                  <a:srgbClr val="F76B15"/>
                 </a:solidFill>
                 <a:latin typeface="Consolas" pitchFamily="34" charset="0"/>
                 <a:ea typeface="Consolas" pitchFamily="34" charset="-122"/>
@@ -6657,7 +6632,7 @@
             <a:r>
               <a:rPr lang="en-US" sz="1300" b="1" dirty="0">
                 <a:solidFill>
-                  <a:srgbClr val="F1F5F9"/>
+                  <a:srgbClr val="F5F5F8"/>
                 </a:solidFill>
                 <a:latin typeface="Calibri" pitchFamily="34" charset="0"/>
                 <a:ea typeface="Calibri" pitchFamily="34" charset="-122"/>
@@ -6696,7 +6671,7 @@
             <a:r>
               <a:rPr lang="en-US" sz="1050" dirty="0">
                 <a:solidFill>
-                  <a:srgbClr val="94A3B8"/>
+                  <a:srgbClr val="C4C6D2"/>
                 </a:solidFill>
                 <a:latin typeface="Calibri" pitchFamily="34" charset="0"/>
                 <a:ea typeface="Calibri" pitchFamily="34" charset="-122"/>
@@ -6721,15 +6696,15 @@
           </a:xfrm>
           <a:prstGeom prst="roundRect">
             <a:avLst>
-              <a:gd name="adj" fmla="val 9091"/>
+              <a:gd name="adj" fmla="val 2273"/>
             </a:avLst>
           </a:prstGeom>
           <a:solidFill>
-            <a:srgbClr val="111827"/>
+            <a:srgbClr val="121219"/>
           </a:solidFill>
           <a:ln w="12700">
             <a:solidFill>
-              <a:srgbClr val="1E3A5F"/>
+              <a:srgbClr val="32323E"/>
             </a:solidFill>
             <a:prstDash val="solid"/>
           </a:ln>
@@ -6762,7 +6737,7 @@
             <a:r>
               <a:rPr lang="en-US" sz="1800" b="1" dirty="0">
                 <a:solidFill>
-                  <a:srgbClr val="EF4444"/>
+                  <a:srgbClr val="E5383B"/>
                 </a:solidFill>
                 <a:latin typeface="Consolas" pitchFamily="34" charset="0"/>
                 <a:ea typeface="Consolas" pitchFamily="34" charset="-122"/>
@@ -6801,7 +6776,7 @@
             <a:r>
               <a:rPr lang="en-US" sz="1300" b="1" dirty="0">
                 <a:solidFill>
-                  <a:srgbClr val="F1F5F9"/>
+                  <a:srgbClr val="F5F5F8"/>
                 </a:solidFill>
                 <a:latin typeface="Calibri" pitchFamily="34" charset="0"/>
                 <a:ea typeface="Calibri" pitchFamily="34" charset="-122"/>
@@ -6840,7 +6815,7 @@
             <a:r>
               <a:rPr lang="en-US" sz="1050" dirty="0">
                 <a:solidFill>
-                  <a:srgbClr val="94A3B8"/>
+                  <a:srgbClr val="C4C6D2"/>
                 </a:solidFill>
                 <a:latin typeface="Calibri" pitchFamily="34" charset="0"/>
                 <a:ea typeface="Calibri" pitchFamily="34" charset="-122"/>
@@ -6879,7 +6854,7 @@
             <a:r>
               <a:rPr lang="en-US" sz="1200" dirty="0">
                 <a:solidFill>
-                  <a:srgbClr val="64748B"/>
+                  <a:srgbClr val="8C8FA1"/>
                 </a:solidFill>
                 <a:latin typeface="Calibri" pitchFamily="34" charset="0"/>
                 <a:ea typeface="Calibri" pitchFamily="34" charset="-122"/>
@@ -6918,13 +6893,13 @@
             <a:r>
               <a:rPr lang="en-US" sz="900" dirty="0">
                 <a:solidFill>
-                  <a:srgbClr val="64748B"/>
-                </a:solidFill>
-                <a:latin typeface="Calibri" pitchFamily="34" charset="0"/>
-                <a:ea typeface="Calibri" pitchFamily="34" charset="-122"/>
-                <a:cs typeface="Calibri" pitchFamily="34" charset="-120"/>
-              </a:rPr>
-              <a:t>NWIS · SIH26121 · synthetic demo data</a:t>
+                  <a:srgbClr val="8C8FA1"/>
+                </a:solidFill>
+                <a:latin typeface="Calibri" pitchFamily="34" charset="0"/>
+                <a:ea typeface="Calibri" pitchFamily="34" charset="-122"/>
+                <a:cs typeface="Calibri" pitchFamily="34" charset="-120"/>
+              </a:rPr>
+              <a:t>NWIS · SIH26121</a:t>
             </a:r>
             <a:endParaRPr lang="en-US" sz="900" dirty="0"/>
           </a:p>
@@ -6957,7 +6932,7 @@
             <a:r>
               <a:rPr lang="en-US" sz="900" dirty="0">
                 <a:solidFill>
-                  <a:srgbClr val="64748B"/>
+                  <a:srgbClr val="8C8FA1"/>
                 </a:solidFill>
                 <a:latin typeface="Calibri" pitchFamily="34" charset="0"/>
                 <a:ea typeface="Calibri" pitchFamily="34" charset="-122"/>
@@ -6983,7 +6958,7 @@
     <p:bg>
       <p:bgPr>
         <a:solidFill>
-          <a:srgbClr val="0A0E17"/>
+          <a:srgbClr val="09090E"/>
         </a:solidFill>
       </p:bgPr>
     </p:bg>
@@ -7028,7 +7003,7 @@
             <a:r>
               <a:rPr lang="en-US" sz="1200" b="1" spc="300" kern="0" dirty="0">
                 <a:solidFill>
-                  <a:srgbClr val="22D3EE"/>
+                  <a:srgbClr val="A79DFF"/>
                 </a:solidFill>
                 <a:latin typeface="Calibri" pitchFamily="34" charset="0"/>
                 <a:ea typeface="Calibri" pitchFamily="34" charset="-122"/>
@@ -7067,7 +7042,7 @@
             <a:r>
               <a:rPr lang="en-US" sz="3200" b="1" dirty="0">
                 <a:solidFill>
-                  <a:srgbClr val="F1F5F9"/>
+                  <a:srgbClr val="F5F5F8"/>
                 </a:solidFill>
                 <a:latin typeface="Calibri" pitchFamily="34" charset="0"/>
                 <a:ea typeface="Calibri" pitchFamily="34" charset="-122"/>
@@ -7092,15 +7067,15 @@
           </a:xfrm>
           <a:prstGeom prst="roundRect">
             <a:avLst>
-              <a:gd name="adj" fmla="val 2474"/>
+              <a:gd name="adj" fmla="val 619"/>
             </a:avLst>
           </a:prstGeom>
           <a:solidFill>
-            <a:srgbClr val="111827"/>
+            <a:srgbClr val="121219"/>
           </a:solidFill>
           <a:ln w="12700">
             <a:solidFill>
-              <a:srgbClr val="1E3A5F"/>
+              <a:srgbClr val="32323E"/>
             </a:solidFill>
             <a:prstDash val="solid"/>
           </a:ln>
@@ -7133,7 +7108,7 @@
             <a:r>
               <a:rPr lang="en-US" sz="1700" b="1" dirty="0">
                 <a:solidFill>
-                  <a:srgbClr val="F1F5F9"/>
+                  <a:srgbClr val="F5F5F8"/>
                 </a:solidFill>
                 <a:latin typeface="Calibri" pitchFamily="34" charset="0"/>
                 <a:ea typeface="Calibri" pitchFamily="34" charset="-122"/>
@@ -7169,8 +7144,8 @@
         </p:nvSpPr>
         <p:spPr>
           <a:xfrm>
-            <a:off x="822960" y="4846320"/>
-            <a:ext cx="4343400" cy="1097280"/>
+            <a:off x="822960" y="4800600"/>
+            <a:ext cx="4343400" cy="1234440"/>
           </a:xfrm>
           <a:prstGeom prst="rect">
             <a:avLst/>
@@ -7184,15 +7159,15 @@
           <a:p>
             <a:pPr marL="342900" indent="-342900">
               <a:spcAft>
-                <a:spcPts val="400"/>
+                <a:spcPts val="300"/>
               </a:spcAft>
               <a:buSzPct val="100000"/>
               <a:buChar char="•"/>
             </a:pPr>
             <a:r>
-              <a:rPr lang="en-US" sz="1200" dirty="0">
-                <a:solidFill>
-                  <a:srgbClr val="94A3B8"/>
+              <a:rPr lang="en-US" sz="1150" dirty="0">
+                <a:solidFill>
+                  <a:srgbClr val="C4C6D2"/>
                 </a:solidFill>
                 <a:latin typeface="Calibri" pitchFamily="34" charset="0"/>
                 <a:ea typeface="Calibri" pitchFamily="34" charset="-122"/>
@@ -7200,20 +7175,20 @@
               </a:rPr>
               <a:t>Thresholds 0.35 · 0.55 · 0.75 (medium · high · critical)</a:t>
             </a:r>
-            <a:endParaRPr lang="en-US" sz="1200" dirty="0"/>
+            <a:endParaRPr lang="en-US" sz="1150" dirty="0"/>
           </a:p>
           <a:p>
             <a:pPr marL="342900" indent="-342900">
               <a:spcAft>
-                <a:spcPts val="400"/>
+                <a:spcPts val="300"/>
               </a:spcAft>
               <a:buSzPct val="100000"/>
               <a:buChar char="•"/>
             </a:pPr>
             <a:r>
-              <a:rPr lang="en-US" sz="1200" dirty="0">
-                <a:solidFill>
-                  <a:srgbClr val="94A3B8"/>
+              <a:rPr lang="en-US" sz="1150" dirty="0">
+                <a:solidFill>
+                  <a:srgbClr val="C4C6D2"/>
                 </a:solidFill>
                 <a:latin typeface="Calibri" pitchFamily="34" charset="0"/>
                 <a:ea typeface="Calibri" pitchFamily="34" charset="-122"/>
@@ -7221,20 +7196,20 @@
               </a:rPr>
               <a:t>Medium-history zones need live confirmation to alert</a:t>
             </a:r>
-            <a:endParaRPr lang="en-US" sz="1200" dirty="0"/>
+            <a:endParaRPr lang="en-US" sz="1150" dirty="0"/>
           </a:p>
           <a:p>
             <a:pPr marL="342900" indent="-342900">
               <a:spcAft>
-                <a:spcPts val="400"/>
+                <a:spcPts val="300"/>
               </a:spcAft>
               <a:buSzPct val="100000"/>
               <a:buChar char="•"/>
             </a:pPr>
             <a:r>
-              <a:rPr lang="en-US" sz="1200" dirty="0">
-                <a:solidFill>
-                  <a:srgbClr val="94A3B8"/>
+              <a:rPr lang="en-US" sz="1150" dirty="0">
+                <a:solidFill>
+                  <a:srgbClr val="C4C6D2"/>
                 </a:solidFill>
                 <a:latin typeface="Calibri" pitchFamily="34" charset="0"/>
                 <a:ea typeface="Calibri" pitchFamily="34" charset="-122"/>
@@ -7242,7 +7217,28 @@
               </a:rPr>
               <a:t>Confidence from supporting wells, sources and similarity</a:t>
             </a:r>
-            <a:endParaRPr lang="en-US" sz="1200" dirty="0"/>
+            <a:endParaRPr lang="en-US" sz="1150" dirty="0"/>
+          </a:p>
+          <a:p>
+            <a:pPr marL="342900" indent="-342900">
+              <a:spcAft>
+                <a:spcPts val="300"/>
+              </a:spcAft>
+              <a:buSzPct val="100000"/>
+              <a:buChar char="•"/>
+            </a:pPr>
+            <a:r>
+              <a:rPr lang="en-US" sz="1150" dirty="0">
+                <a:solidFill>
+                  <a:srgbClr val="C4C6D2"/>
+                </a:solidFill>
+                <a:latin typeface="Calibri" pitchFamily="34" charset="0"/>
+                <a:ea typeface="Calibri" pitchFamily="34" charset="-122"/>
+                <a:cs typeface="Calibri" pitchFamily="34" charset="-120"/>
+              </a:rPr>
+              <a:t>Learned cross-check: logistic model backtested on 12 offset wells — AUC 0.86 vs 0.76 hand-set</a:t>
+            </a:r>
+            <a:endParaRPr lang="en-US" sz="1150" dirty="0"/>
           </a:p>
         </p:txBody>
       </p:sp>
@@ -7259,15 +7255,15 @@
           </a:xfrm>
           <a:prstGeom prst="roundRect">
             <a:avLst>
-              <a:gd name="adj" fmla="val 2252"/>
+              <a:gd name="adj" fmla="val 676"/>
             </a:avLst>
           </a:prstGeom>
           <a:solidFill>
-            <a:srgbClr val="111827"/>
+            <a:srgbClr val="121219"/>
           </a:solidFill>
           <a:ln w="12700">
             <a:solidFill>
-              <a:srgbClr val="1E3A5F"/>
+              <a:srgbClr val="32323E"/>
             </a:solidFill>
             <a:prstDash val="solid"/>
           </a:ln>
@@ -7290,7 +7286,7 @@
         <p:spPr>
           <a:xfrm>
             <a:off x="6400800" y="1645920"/>
-            <a:ext cx="5120640" cy="3955494"/>
+            <a:ext cx="5120640" cy="3703320"/>
           </a:xfrm>
           <a:prstGeom prst="rect">
             <a:avLst/>
@@ -7324,7 +7320,7 @@
             <a:r>
               <a:rPr lang="en-US" sz="1150" b="1" dirty="0">
                 <a:solidFill>
-                  <a:srgbClr val="22D3EE"/>
+                  <a:srgbClr val="A79DFF"/>
                 </a:solidFill>
                 <a:latin typeface="Calibri" pitchFamily="34" charset="0"/>
                 <a:ea typeface="Calibri" pitchFamily="34" charset="-122"/>
@@ -7363,13 +7359,13 @@
             <a:r>
               <a:rPr lang="en-US" sz="900" dirty="0">
                 <a:solidFill>
-                  <a:srgbClr val="64748B"/>
-                </a:solidFill>
-                <a:latin typeface="Calibri" pitchFamily="34" charset="0"/>
-                <a:ea typeface="Calibri" pitchFamily="34" charset="-122"/>
-                <a:cs typeface="Calibri" pitchFamily="34" charset="-120"/>
-              </a:rPr>
-              <a:t>NWIS · SIH26121 · synthetic demo data</a:t>
+                  <a:srgbClr val="8C8FA1"/>
+                </a:solidFill>
+                <a:latin typeface="Calibri" pitchFamily="34" charset="0"/>
+                <a:ea typeface="Calibri" pitchFamily="34" charset="-122"/>
+                <a:cs typeface="Calibri" pitchFamily="34" charset="-120"/>
+              </a:rPr>
+              <a:t>NWIS · SIH26121</a:t>
             </a:r>
             <a:endParaRPr lang="en-US" sz="900" dirty="0"/>
           </a:p>
@@ -7402,7 +7398,7 @@
             <a:r>
               <a:rPr lang="en-US" sz="900" dirty="0">
                 <a:solidFill>
-                  <a:srgbClr val="64748B"/>
+                  <a:srgbClr val="8C8FA1"/>
                 </a:solidFill>
                 <a:latin typeface="Calibri" pitchFamily="34" charset="0"/>
                 <a:ea typeface="Calibri" pitchFamily="34" charset="-122"/>
@@ -7428,7 +7424,7 @@
     <p:bg>
       <p:bgPr>
         <a:solidFill>
-          <a:srgbClr val="0A0E17"/>
+          <a:srgbClr val="09090E"/>
         </a:solidFill>
       </p:bgPr>
     </p:bg>
@@ -7473,7 +7469,7 @@
             <a:r>
               <a:rPr lang="en-US" sz="1200" b="1" spc="300" kern="0" dirty="0">
                 <a:solidFill>
-                  <a:srgbClr val="22D3EE"/>
+                  <a:srgbClr val="A79DFF"/>
                 </a:solidFill>
                 <a:latin typeface="Calibri" pitchFamily="34" charset="0"/>
                 <a:ea typeface="Calibri" pitchFamily="34" charset="-122"/>
@@ -7512,7 +7508,7 @@
             <a:r>
               <a:rPr lang="en-US" sz="3200" b="1" dirty="0">
                 <a:solidFill>
-                  <a:srgbClr val="F1F5F9"/>
+                  <a:srgbClr val="F5F5F8"/>
                 </a:solidFill>
                 <a:latin typeface="Calibri" pitchFamily="34" charset="0"/>
                 <a:ea typeface="Calibri" pitchFamily="34" charset="-122"/>
@@ -7537,15 +7533,15 @@
           </a:xfrm>
           <a:prstGeom prst="roundRect">
             <a:avLst>
-              <a:gd name="adj" fmla="val 2335"/>
+              <a:gd name="adj" fmla="val 701"/>
             </a:avLst>
           </a:prstGeom>
           <a:solidFill>
-            <a:srgbClr val="111827"/>
+            <a:srgbClr val="121219"/>
           </a:solidFill>
           <a:ln w="12700">
             <a:solidFill>
-              <a:srgbClr val="1E3A5F"/>
+              <a:srgbClr val="32323E"/>
             </a:solidFill>
             <a:prstDash val="solid"/>
           </a:ln>
@@ -7590,11 +7586,11 @@
             <a:avLst/>
           </a:prstGeom>
           <a:solidFill>
-            <a:srgbClr val="1E293B"/>
+            <a:srgbClr val="1F1F29"/>
           </a:solidFill>
           <a:ln w="15875">
             <a:solidFill>
-              <a:srgbClr val="1E3A5F"/>
+              <a:srgbClr val="32323E"/>
             </a:solidFill>
             <a:prstDash val="solid"/>
           </a:ln>
@@ -7651,7 +7647,7 @@
             <a:r>
               <a:rPr lang="en-US" sz="1600" b="1" dirty="0">
                 <a:solidFill>
-                  <a:srgbClr val="F1F5F9"/>
+                  <a:srgbClr val="F5F5F8"/>
                 </a:solidFill>
                 <a:latin typeface="Calibri" pitchFamily="34" charset="0"/>
                 <a:ea typeface="Calibri" pitchFamily="34" charset="-122"/>
@@ -7690,7 +7686,7 @@
             <a:r>
               <a:rPr lang="en-US" sz="1200" dirty="0">
                 <a:solidFill>
-                  <a:srgbClr val="94A3B8"/>
+                  <a:srgbClr val="C4C6D2"/>
                 </a:solidFill>
                 <a:latin typeface="Calibri" pitchFamily="34" charset="0"/>
                 <a:ea typeface="Calibri" pitchFamily="34" charset="-122"/>
@@ -7717,11 +7713,11 @@
             <a:avLst/>
           </a:prstGeom>
           <a:solidFill>
-            <a:srgbClr val="1E293B"/>
+            <a:srgbClr val="1F1F29"/>
           </a:solidFill>
           <a:ln w="15875">
             <a:solidFill>
-              <a:srgbClr val="1E3A5F"/>
+              <a:srgbClr val="32323E"/>
             </a:solidFill>
             <a:prstDash val="solid"/>
           </a:ln>
@@ -7778,7 +7774,7 @@
             <a:r>
               <a:rPr lang="en-US" sz="1600" b="1" dirty="0">
                 <a:solidFill>
-                  <a:srgbClr val="F1F5F9"/>
+                  <a:srgbClr val="F5F5F8"/>
                 </a:solidFill>
                 <a:latin typeface="Calibri" pitchFamily="34" charset="0"/>
                 <a:ea typeface="Calibri" pitchFamily="34" charset="-122"/>
@@ -7817,7 +7813,7 @@
             <a:r>
               <a:rPr lang="en-US" sz="1200" dirty="0">
                 <a:solidFill>
-                  <a:srgbClr val="94A3B8"/>
+                  <a:srgbClr val="C4C6D2"/>
                 </a:solidFill>
                 <a:latin typeface="Calibri" pitchFamily="34" charset="0"/>
                 <a:ea typeface="Calibri" pitchFamily="34" charset="-122"/>
@@ -7844,11 +7840,11 @@
             <a:avLst/>
           </a:prstGeom>
           <a:solidFill>
-            <a:srgbClr val="1E293B"/>
+            <a:srgbClr val="1F1F29"/>
           </a:solidFill>
           <a:ln w="15875">
             <a:solidFill>
-              <a:srgbClr val="1E3A5F"/>
+              <a:srgbClr val="32323E"/>
             </a:solidFill>
             <a:prstDash val="solid"/>
           </a:ln>
@@ -7905,7 +7901,7 @@
             <a:r>
               <a:rPr lang="en-US" sz="1600" b="1" dirty="0">
                 <a:solidFill>
-                  <a:srgbClr val="F1F5F9"/>
+                  <a:srgbClr val="F5F5F8"/>
                 </a:solidFill>
                 <a:latin typeface="Calibri" pitchFamily="34" charset="0"/>
                 <a:ea typeface="Calibri" pitchFamily="34" charset="-122"/>
@@ -7944,7 +7940,7 @@
             <a:r>
               <a:rPr lang="en-US" sz="1200" dirty="0">
                 <a:solidFill>
-                  <a:srgbClr val="94A3B8"/>
+                  <a:srgbClr val="C4C6D2"/>
                 </a:solidFill>
                 <a:latin typeface="Calibri" pitchFamily="34" charset="0"/>
                 <a:ea typeface="Calibri" pitchFamily="34" charset="-122"/>
@@ -7983,7 +7979,7 @@
             <a:r>
               <a:rPr lang="en-US" sz="1200" dirty="0">
                 <a:solidFill>
-                  <a:srgbClr val="64748B"/>
+                  <a:srgbClr val="8C8FA1"/>
                 </a:solidFill>
                 <a:latin typeface="Calibri" pitchFamily="34" charset="0"/>
                 <a:ea typeface="Calibri" pitchFamily="34" charset="-122"/>
@@ -8022,13 +8018,13 @@
             <a:r>
               <a:rPr lang="en-US" sz="900" dirty="0">
                 <a:solidFill>
-                  <a:srgbClr val="64748B"/>
-                </a:solidFill>
-                <a:latin typeface="Calibri" pitchFamily="34" charset="0"/>
-                <a:ea typeface="Calibri" pitchFamily="34" charset="-122"/>
-                <a:cs typeface="Calibri" pitchFamily="34" charset="-120"/>
-              </a:rPr>
-              <a:t>NWIS · SIH26121 · synthetic demo data</a:t>
+                  <a:srgbClr val="8C8FA1"/>
+                </a:solidFill>
+                <a:latin typeface="Calibri" pitchFamily="34" charset="0"/>
+                <a:ea typeface="Calibri" pitchFamily="34" charset="-122"/>
+                <a:cs typeface="Calibri" pitchFamily="34" charset="-120"/>
+              </a:rPr>
+              <a:t>NWIS · SIH26121</a:t>
             </a:r>
             <a:endParaRPr lang="en-US" sz="900" dirty="0"/>
           </a:p>
@@ -8061,7 +8057,7 @@
             <a:r>
               <a:rPr lang="en-US" sz="900" dirty="0">
                 <a:solidFill>
-                  <a:srgbClr val="64748B"/>
+                  <a:srgbClr val="8C8FA1"/>
                 </a:solidFill>
                 <a:latin typeface="Calibri" pitchFamily="34" charset="0"/>
                 <a:ea typeface="Calibri" pitchFamily="34" charset="-122"/>
@@ -8087,7 +8083,7 @@
     <p:bg>
       <p:bgPr>
         <a:solidFill>
-          <a:srgbClr val="0A0E17"/>
+          <a:srgbClr val="09090E"/>
         </a:solidFill>
       </p:bgPr>
     </p:bg>
@@ -8132,7 +8128,7 @@
             <a:r>
               <a:rPr lang="en-US" sz="1200" b="1" spc="300" kern="0" dirty="0">
                 <a:solidFill>
-                  <a:srgbClr val="22D3EE"/>
+                  <a:srgbClr val="A79DFF"/>
                 </a:solidFill>
                 <a:latin typeface="Calibri" pitchFamily="34" charset="0"/>
                 <a:ea typeface="Calibri" pitchFamily="34" charset="-122"/>
@@ -8171,7 +8167,7 @@
             <a:r>
               <a:rPr lang="en-US" sz="3200" b="1" dirty="0">
                 <a:solidFill>
-                  <a:srgbClr val="F1F5F9"/>
+                  <a:srgbClr val="F5F5F8"/>
                 </a:solidFill>
                 <a:latin typeface="Calibri" pitchFamily="34" charset="0"/>
                 <a:ea typeface="Calibri" pitchFamily="34" charset="-122"/>
@@ -8198,11 +8194,11 @@
             <a:avLst/>
           </a:prstGeom>
           <a:solidFill>
-            <a:srgbClr val="1E293B"/>
+            <a:srgbClr val="1F1F29"/>
           </a:solidFill>
           <a:ln w="15875">
             <a:solidFill>
-              <a:srgbClr val="22D3EE"/>
+              <a:srgbClr val="A79DFF"/>
             </a:solidFill>
             <a:prstDash val="solid"/>
           </a:ln>
@@ -8235,7 +8231,7 @@
             <a:r>
               <a:rPr lang="en-US" sz="1300" b="1" dirty="0">
                 <a:solidFill>
-                  <a:srgbClr val="22D3EE"/>
+                  <a:srgbClr val="A79DFF"/>
                 </a:solidFill>
                 <a:latin typeface="Calibri" pitchFamily="34" charset="0"/>
                 <a:ea typeface="Calibri" pitchFamily="34" charset="-122"/>
@@ -8274,7 +8270,7 @@
             <a:r>
               <a:rPr lang="en-US" sz="1200" b="1" dirty="0">
                 <a:solidFill>
-                  <a:srgbClr val="F1F5F9"/>
+                  <a:srgbClr val="F5F5F8"/>
                 </a:solidFill>
                 <a:latin typeface="Calibri" pitchFamily="34" charset="0"/>
                 <a:ea typeface="Calibri" pitchFamily="34" charset="-122"/>
@@ -8303,7 +8299,7 @@
           <a:noFill/>
           <a:ln w="19050">
             <a:solidFill>
-              <a:srgbClr val="1E3A5F"/>
+              <a:srgbClr val="32323E"/>
             </a:solidFill>
             <a:prstDash val="solid"/>
           </a:ln>
@@ -8324,11 +8320,11 @@
             <a:avLst/>
           </a:prstGeom>
           <a:solidFill>
-            <a:srgbClr val="1E293B"/>
+            <a:srgbClr val="1F1F29"/>
           </a:solidFill>
           <a:ln w="15875">
             <a:solidFill>
-              <a:srgbClr val="22D3EE"/>
+              <a:srgbClr val="A79DFF"/>
             </a:solidFill>
             <a:prstDash val="solid"/>
           </a:ln>
@@ -8361,7 +8357,7 @@
             <a:r>
               <a:rPr lang="en-US" sz="1300" b="1" dirty="0">
                 <a:solidFill>
-                  <a:srgbClr val="22D3EE"/>
+                  <a:srgbClr val="A79DFF"/>
                 </a:solidFill>
                 <a:latin typeface="Calibri" pitchFamily="34" charset="0"/>
                 <a:ea typeface="Calibri" pitchFamily="34" charset="-122"/>
@@ -8400,7 +8396,7 @@
             <a:r>
               <a:rPr lang="en-US" sz="1200" b="1" dirty="0">
                 <a:solidFill>
-                  <a:srgbClr val="F1F5F9"/>
+                  <a:srgbClr val="F5F5F8"/>
                 </a:solidFill>
                 <a:latin typeface="Calibri" pitchFamily="34" charset="0"/>
                 <a:ea typeface="Calibri" pitchFamily="34" charset="-122"/>
@@ -8429,7 +8425,7 @@
           <a:noFill/>
           <a:ln w="19050">
             <a:solidFill>
-              <a:srgbClr val="1E3A5F"/>
+              <a:srgbClr val="32323E"/>
             </a:solidFill>
             <a:prstDash val="solid"/>
           </a:ln>
@@ -8450,11 +8446,11 @@
             <a:avLst/>
           </a:prstGeom>
           <a:solidFill>
-            <a:srgbClr val="1E293B"/>
+            <a:srgbClr val="1F1F29"/>
           </a:solidFill>
           <a:ln w="15875">
             <a:solidFill>
-              <a:srgbClr val="22D3EE"/>
+              <a:srgbClr val="A79DFF"/>
             </a:solidFill>
             <a:prstDash val="solid"/>
           </a:ln>
@@ -8487,7 +8483,7 @@
             <a:r>
               <a:rPr lang="en-US" sz="1300" b="1" dirty="0">
                 <a:solidFill>
-                  <a:srgbClr val="22D3EE"/>
+                  <a:srgbClr val="A79DFF"/>
                 </a:solidFill>
                 <a:latin typeface="Calibri" pitchFamily="34" charset="0"/>
                 <a:ea typeface="Calibri" pitchFamily="34" charset="-122"/>
@@ -8526,7 +8522,7 @@
             <a:r>
               <a:rPr lang="en-US" sz="1200" b="1" dirty="0">
                 <a:solidFill>
-                  <a:srgbClr val="F1F5F9"/>
+                  <a:srgbClr val="F5F5F8"/>
                 </a:solidFill>
                 <a:latin typeface="Calibri" pitchFamily="34" charset="0"/>
                 <a:ea typeface="Calibri" pitchFamily="34" charset="-122"/>
@@ -8555,7 +8551,7 @@
           <a:noFill/>
           <a:ln w="19050">
             <a:solidFill>
-              <a:srgbClr val="1E3A5F"/>
+              <a:srgbClr val="32323E"/>
             </a:solidFill>
             <a:prstDash val="solid"/>
           </a:ln>
@@ -8576,11 +8572,11 @@
             <a:avLst/>
           </a:prstGeom>
           <a:solidFill>
-            <a:srgbClr val="1E293B"/>
+            <a:srgbClr val="1F1F29"/>
           </a:solidFill>
           <a:ln w="15875">
             <a:solidFill>
-              <a:srgbClr val="22D3EE"/>
+              <a:srgbClr val="A79DFF"/>
             </a:solidFill>
             <a:prstDash val="solid"/>
           </a:ln>
@@ -8613,7 +8609,7 @@
             <a:r>
               <a:rPr lang="en-US" sz="1300" b="1" dirty="0">
                 <a:solidFill>
-                  <a:srgbClr val="22D3EE"/>
+                  <a:srgbClr val="A79DFF"/>
                 </a:solidFill>
                 <a:latin typeface="Calibri" pitchFamily="34" charset="0"/>
                 <a:ea typeface="Calibri" pitchFamily="34" charset="-122"/>
@@ -8652,7 +8648,7 @@
             <a:r>
               <a:rPr lang="en-US" sz="1200" b="1" dirty="0">
                 <a:solidFill>
-                  <a:srgbClr val="F1F5F9"/>
+                  <a:srgbClr val="F5F5F8"/>
                 </a:solidFill>
                 <a:latin typeface="Calibri" pitchFamily="34" charset="0"/>
                 <a:ea typeface="Calibri" pitchFamily="34" charset="-122"/>
@@ -8681,7 +8677,7 @@
           <a:noFill/>
           <a:ln w="19050">
             <a:solidFill>
-              <a:srgbClr val="1E3A5F"/>
+              <a:srgbClr val="32323E"/>
             </a:solidFill>
             <a:prstDash val="solid"/>
           </a:ln>
@@ -8702,11 +8698,11 @@
             <a:avLst/>
           </a:prstGeom>
           <a:solidFill>
-            <a:srgbClr val="1E293B"/>
+            <a:srgbClr val="1F1F29"/>
           </a:solidFill>
           <a:ln w="15875">
             <a:solidFill>
-              <a:srgbClr val="22D3EE"/>
+              <a:srgbClr val="A79DFF"/>
             </a:solidFill>
             <a:prstDash val="solid"/>
           </a:ln>
@@ -8739,7 +8735,7 @@
             <a:r>
               <a:rPr lang="en-US" sz="1300" b="1" dirty="0">
                 <a:solidFill>
-                  <a:srgbClr val="22D3EE"/>
+                  <a:srgbClr val="A79DFF"/>
                 </a:solidFill>
                 <a:latin typeface="Calibri" pitchFamily="34" charset="0"/>
                 <a:ea typeface="Calibri" pitchFamily="34" charset="-122"/>
@@ -8778,7 +8774,7 @@
             <a:r>
               <a:rPr lang="en-US" sz="1200" b="1" dirty="0">
                 <a:solidFill>
-                  <a:srgbClr val="F1F5F9"/>
+                  <a:srgbClr val="F5F5F8"/>
                 </a:solidFill>
                 <a:latin typeface="Calibri" pitchFamily="34" charset="0"/>
                 <a:ea typeface="Calibri" pitchFamily="34" charset="-122"/>
@@ -8807,7 +8803,7 @@
           <a:noFill/>
           <a:ln w="19050">
             <a:solidFill>
-              <a:srgbClr val="1E3A5F"/>
+              <a:srgbClr val="32323E"/>
             </a:solidFill>
             <a:prstDash val="solid"/>
           </a:ln>
@@ -8828,11 +8824,11 @@
             <a:avLst/>
           </a:prstGeom>
           <a:solidFill>
-            <a:srgbClr val="F59E0B"/>
+            <a:srgbClr val="F2A60C"/>
           </a:solidFill>
           <a:ln w="15875">
             <a:solidFill>
-              <a:srgbClr val="F59E0B"/>
+              <a:srgbClr val="F2A60C"/>
             </a:solidFill>
             <a:prstDash val="solid"/>
           </a:ln>
@@ -8865,7 +8861,7 @@
             <a:r>
               <a:rPr lang="en-US" sz="1300" b="1" dirty="0">
                 <a:solidFill>
-                  <a:srgbClr val="0A0E17"/>
+                  <a:srgbClr val="09090E"/>
                 </a:solidFill>
                 <a:latin typeface="Calibri" pitchFamily="34" charset="0"/>
                 <a:ea typeface="Calibri" pitchFamily="34" charset="-122"/>
@@ -8904,7 +8900,7 @@
             <a:r>
               <a:rPr lang="en-US" sz="1200" b="1" dirty="0">
                 <a:solidFill>
-                  <a:srgbClr val="F1F5F9"/>
+                  <a:srgbClr val="F5F5F8"/>
                 </a:solidFill>
                 <a:latin typeface="Calibri" pitchFamily="34" charset="0"/>
                 <a:ea typeface="Calibri" pitchFamily="34" charset="-122"/>
@@ -8933,7 +8929,7 @@
           <a:noFill/>
           <a:ln w="19050">
             <a:solidFill>
-              <a:srgbClr val="1E3A5F"/>
+              <a:srgbClr val="32323E"/>
             </a:solidFill>
             <a:prstDash val="solid"/>
           </a:ln>
@@ -8954,11 +8950,11 @@
             <a:avLst/>
           </a:prstGeom>
           <a:solidFill>
-            <a:srgbClr val="1E293B"/>
+            <a:srgbClr val="1F1F29"/>
           </a:solidFill>
           <a:ln w="15875">
             <a:solidFill>
-              <a:srgbClr val="22D3EE"/>
+              <a:srgbClr val="A79DFF"/>
             </a:solidFill>
             <a:prstDash val="solid"/>
           </a:ln>
@@ -8991,7 +8987,7 @@
             <a:r>
               <a:rPr lang="en-US" sz="1300" b="1" dirty="0">
                 <a:solidFill>
-                  <a:srgbClr val="22D3EE"/>
+                  <a:srgbClr val="A79DFF"/>
                 </a:solidFill>
                 <a:latin typeface="Calibri" pitchFamily="34" charset="0"/>
                 <a:ea typeface="Calibri" pitchFamily="34" charset="-122"/>
@@ -9030,7 +9026,7 @@
             <a:r>
               <a:rPr lang="en-US" sz="1200" b="1" dirty="0">
                 <a:solidFill>
-                  <a:srgbClr val="F1F5F9"/>
+                  <a:srgbClr val="F5F5F8"/>
                 </a:solidFill>
                 <a:latin typeface="Calibri" pitchFamily="34" charset="0"/>
                 <a:ea typeface="Calibri" pitchFamily="34" charset="-122"/>
@@ -9055,15 +9051,15 @@
           </a:xfrm>
           <a:prstGeom prst="roundRect">
             <a:avLst>
-              <a:gd name="adj" fmla="val 2816"/>
+              <a:gd name="adj" fmla="val 845"/>
             </a:avLst>
           </a:prstGeom>
           <a:solidFill>
-            <a:srgbClr val="111827"/>
+            <a:srgbClr val="121219"/>
           </a:solidFill>
           <a:ln w="12700">
             <a:solidFill>
-              <a:srgbClr val="1E3A5F"/>
+              <a:srgbClr val="32323E"/>
             </a:solidFill>
             <a:prstDash val="solid"/>
           </a:ln>
@@ -9124,13 +9120,13 @@
             <a:r>
               <a:rPr lang="en-US" sz="1350" dirty="0">
                 <a:solidFill>
-                  <a:srgbClr val="F1F5F9"/>
-                </a:solidFill>
-                <a:latin typeface="Calibri" pitchFamily="34" charset="0"/>
-                <a:ea typeface="Calibri" pitchFamily="34" charset="-122"/>
-                <a:cs typeface="Calibri" pitchFamily="34" charset="-120"/>
-              </a:rPr>
-              <a:t>PDF text layer, TXT, or images via the OCR adapter (Tesseract)</a:t>
+                  <a:srgbClr val="F5F5F8"/>
+                </a:solidFill>
+                <a:latin typeface="Calibri" pitchFamily="34" charset="0"/>
+                <a:ea typeface="Calibri" pitchFamily="34" charset="-122"/>
+                <a:cs typeface="Calibri" pitchFamily="34" charset="-120"/>
+              </a:rPr>
+              <a:t>Text-layer PDFs, plus scanned PDFs and images read by Tesseract OCR (per-page word confidence)</a:t>
             </a:r>
             <a:endParaRPr lang="en-US" sz="1350" dirty="0"/>
           </a:p>
@@ -9145,7 +9141,7 @@
             <a:r>
               <a:rPr lang="en-US" sz="1350" dirty="0">
                 <a:solidFill>
-                  <a:srgbClr val="F1F5F9"/>
+                  <a:srgbClr val="F5F5F8"/>
                 </a:solidFill>
                 <a:latin typeface="Calibri" pitchFamily="34" charset="0"/>
                 <a:ea typeface="Calibri" pitchFamily="34" charset="-122"/>
@@ -9166,7 +9162,7 @@
             <a:r>
               <a:rPr lang="en-US" sz="1350" dirty="0">
                 <a:solidFill>
-                  <a:srgbClr val="F1F5F9"/>
+                  <a:srgbClr val="F5F5F8"/>
                 </a:solidFill>
                 <a:latin typeface="Calibri" pitchFamily="34" charset="0"/>
                 <a:ea typeface="Calibri" pitchFamily="34" charset="-122"/>
@@ -9187,7 +9183,7 @@
             <a:r>
               <a:rPr lang="en-US" sz="1350" dirty="0">
                 <a:solidFill>
-                  <a:srgbClr val="F1F5F9"/>
+                  <a:srgbClr val="F5F5F8"/>
                 </a:solidFill>
                 <a:latin typeface="Calibri" pitchFamily="34" charset="0"/>
                 <a:ea typeface="Calibri" pitchFamily="34" charset="-122"/>
@@ -9208,7 +9204,7 @@
             <a:r>
               <a:rPr lang="en-US" sz="1350" dirty="0">
                 <a:solidFill>
-                  <a:srgbClr val="F1F5F9"/>
+                  <a:srgbClr val="F5F5F8"/>
                 </a:solidFill>
                 <a:latin typeface="Calibri" pitchFamily="34" charset="0"/>
                 <a:ea typeface="Calibri" pitchFamily="34" charset="-122"/>
@@ -9247,13 +9243,13 @@
             <a:r>
               <a:rPr lang="en-US" sz="900" dirty="0">
                 <a:solidFill>
-                  <a:srgbClr val="64748B"/>
-                </a:solidFill>
-                <a:latin typeface="Calibri" pitchFamily="34" charset="0"/>
-                <a:ea typeface="Calibri" pitchFamily="34" charset="-122"/>
-                <a:cs typeface="Calibri" pitchFamily="34" charset="-120"/>
-              </a:rPr>
-              <a:t>NWIS · SIH26121 · synthetic demo data</a:t>
+                  <a:srgbClr val="8C8FA1"/>
+                </a:solidFill>
+                <a:latin typeface="Calibri" pitchFamily="34" charset="0"/>
+                <a:ea typeface="Calibri" pitchFamily="34" charset="-122"/>
+                <a:cs typeface="Calibri" pitchFamily="34" charset="-120"/>
+              </a:rPr>
+              <a:t>NWIS · SIH26121</a:t>
             </a:r>
             <a:endParaRPr lang="en-US" sz="900" dirty="0"/>
           </a:p>
@@ -9286,7 +9282,7 @@
             <a:r>
               <a:rPr lang="en-US" sz="900" dirty="0">
                 <a:solidFill>
-                  <a:srgbClr val="64748B"/>
+                  <a:srgbClr val="8C8FA1"/>
                 </a:solidFill>
                 <a:latin typeface="Calibri" pitchFamily="34" charset="0"/>
                 <a:ea typeface="Calibri" pitchFamily="34" charset="-122"/>
@@ -9312,7 +9308,7 @@
     <p:bg>
       <p:bgPr>
         <a:solidFill>
-          <a:srgbClr val="0A0E17"/>
+          <a:srgbClr val="09090E"/>
         </a:solidFill>
       </p:bgPr>
     </p:bg>
@@ -9357,7 +9353,7 @@
             <a:r>
               <a:rPr lang="en-US" sz="1200" b="1" spc="300" kern="0" dirty="0">
                 <a:solidFill>
-                  <a:srgbClr val="22D3EE"/>
+                  <a:srgbClr val="A79DFF"/>
                 </a:solidFill>
                 <a:latin typeface="Calibri" pitchFamily="34" charset="0"/>
                 <a:ea typeface="Calibri" pitchFamily="34" charset="-122"/>
@@ -9396,7 +9392,7 @@
             <a:r>
               <a:rPr lang="en-US" sz="3200" b="1" dirty="0">
                 <a:solidFill>
-                  <a:srgbClr val="F1F5F9"/>
+                  <a:srgbClr val="F5F5F8"/>
                 </a:solidFill>
                 <a:latin typeface="Calibri" pitchFamily="34" charset="0"/>
                 <a:ea typeface="Calibri" pitchFamily="34" charset="-122"/>
@@ -9421,15 +9417,15 @@
           </a:xfrm>
           <a:prstGeom prst="roundRect">
             <a:avLst>
-              <a:gd name="adj" fmla="val 4364"/>
+              <a:gd name="adj" fmla="val 1091"/>
             </a:avLst>
           </a:prstGeom>
           <a:solidFill>
-            <a:srgbClr val="111827"/>
+            <a:srgbClr val="121219"/>
           </a:solidFill>
           <a:ln w="12700">
             <a:solidFill>
-              <a:srgbClr val="1E3A5F"/>
+              <a:srgbClr val="32323E"/>
             </a:solidFill>
             <a:prstDash val="solid"/>
           </a:ln>
@@ -9462,7 +9458,7 @@
             <a:r>
               <a:rPr lang="en-US" sz="1500" b="1" dirty="0">
                 <a:solidFill>
-                  <a:srgbClr val="22D3EE"/>
+                  <a:srgbClr val="A79DFF"/>
                 </a:solidFill>
                 <a:latin typeface="Calibri" pitchFamily="34" charset="0"/>
                 <a:ea typeface="Calibri" pitchFamily="34" charset="-122"/>
@@ -9505,7 +9501,7 @@
             <a:r>
               <a:rPr lang="en-US" sz="1250" dirty="0">
                 <a:solidFill>
-                  <a:srgbClr val="F1F5F9"/>
+                  <a:srgbClr val="F5F5F8"/>
                 </a:solidFill>
                 <a:latin typeface="Calibri" pitchFamily="34" charset="0"/>
                 <a:ea typeface="Calibri" pitchFamily="34" charset="-122"/>
@@ -9526,7 +9522,7 @@
             <a:r>
               <a:rPr lang="en-US" sz="1250" dirty="0">
                 <a:solidFill>
-                  <a:srgbClr val="F1F5F9"/>
+                  <a:srgbClr val="F5F5F8"/>
                 </a:solidFill>
                 <a:latin typeface="Calibri" pitchFamily="34" charset="0"/>
                 <a:ea typeface="Calibri" pitchFamily="34" charset="-122"/>
@@ -9547,7 +9543,7 @@
             <a:r>
               <a:rPr lang="en-US" sz="1250" dirty="0">
                 <a:solidFill>
-                  <a:srgbClr val="F1F5F9"/>
+                  <a:srgbClr val="F5F5F8"/>
                 </a:solidFill>
                 <a:latin typeface="Calibri" pitchFamily="34" charset="0"/>
                 <a:ea typeface="Calibri" pitchFamily="34" charset="-122"/>
@@ -9568,7 +9564,7 @@
             <a:r>
               <a:rPr lang="en-US" sz="1250" dirty="0">
                 <a:solidFill>
-                  <a:srgbClr val="F1F5F9"/>
+                  <a:srgbClr val="F5F5F8"/>
                 </a:solidFill>
                 <a:latin typeface="Calibri" pitchFamily="34" charset="0"/>
                 <a:ea typeface="Calibri" pitchFamily="34" charset="-122"/>
@@ -9607,7 +9603,7 @@
             <a:r>
               <a:rPr lang="en-US" sz="2400" b="1" dirty="0">
                 <a:solidFill>
-                  <a:srgbClr val="22D3EE"/>
+                  <a:srgbClr val="A79DFF"/>
                 </a:solidFill>
                 <a:latin typeface="Calibri" pitchFamily="34" charset="0"/>
                 <a:ea typeface="Calibri" pitchFamily="34" charset="-122"/>
@@ -9632,15 +9628,15 @@
           </a:xfrm>
           <a:prstGeom prst="roundRect">
             <a:avLst>
-              <a:gd name="adj" fmla="val 4364"/>
+              <a:gd name="adj" fmla="val 1091"/>
             </a:avLst>
           </a:prstGeom>
           <a:solidFill>
-            <a:srgbClr val="1E293B"/>
+            <a:srgbClr val="1F1F29"/>
           </a:solidFill>
           <a:ln w="12700">
             <a:solidFill>
-              <a:srgbClr val="1E3A5F"/>
+              <a:srgbClr val="32323E"/>
             </a:solidFill>
             <a:prstDash val="solid"/>
           </a:ln>
@@ -9673,7 +9669,7 @@
             <a:r>
               <a:rPr lang="en-US" sz="1500" b="1" dirty="0">
                 <a:solidFill>
-                  <a:srgbClr val="22D3EE"/>
+                  <a:srgbClr val="A79DFF"/>
                 </a:solidFill>
                 <a:latin typeface="Calibri" pitchFamily="34" charset="0"/>
                 <a:ea typeface="Calibri" pitchFamily="34" charset="-122"/>
@@ -9716,7 +9712,7 @@
             <a:r>
               <a:rPr lang="en-US" sz="1250" dirty="0">
                 <a:solidFill>
-                  <a:srgbClr val="F1F5F9"/>
+                  <a:srgbClr val="F5F5F8"/>
                 </a:solidFill>
                 <a:latin typeface="Calibri" pitchFamily="34" charset="0"/>
                 <a:ea typeface="Calibri" pitchFamily="34" charset="-122"/>
@@ -9737,7 +9733,7 @@
             <a:r>
               <a:rPr lang="en-US" sz="1250" dirty="0">
                 <a:solidFill>
-                  <a:srgbClr val="F1F5F9"/>
+                  <a:srgbClr val="F5F5F8"/>
                 </a:solidFill>
                 <a:latin typeface="Calibri" pitchFamily="34" charset="0"/>
                 <a:ea typeface="Calibri" pitchFamily="34" charset="-122"/>
@@ -9758,7 +9754,7 @@
             <a:r>
               <a:rPr lang="en-US" sz="1250" dirty="0">
                 <a:solidFill>
-                  <a:srgbClr val="F1F5F9"/>
+                  <a:srgbClr val="F5F5F8"/>
                 </a:solidFill>
                 <a:latin typeface="Calibri" pitchFamily="34" charset="0"/>
                 <a:ea typeface="Calibri" pitchFamily="34" charset="-122"/>
@@ -9779,7 +9775,7 @@
             <a:r>
               <a:rPr lang="en-US" sz="1250" dirty="0">
                 <a:solidFill>
-                  <a:srgbClr val="F1F5F9"/>
+                  <a:srgbClr val="F5F5F8"/>
                 </a:solidFill>
                 <a:latin typeface="Calibri" pitchFamily="34" charset="0"/>
                 <a:ea typeface="Calibri" pitchFamily="34" charset="-122"/>
@@ -9800,7 +9796,7 @@
             <a:r>
               <a:rPr lang="en-US" sz="1250" dirty="0">
                 <a:solidFill>
-                  <a:srgbClr val="F1F5F9"/>
+                  <a:srgbClr val="F5F5F8"/>
                 </a:solidFill>
                 <a:latin typeface="Calibri" pitchFamily="34" charset="0"/>
                 <a:ea typeface="Calibri" pitchFamily="34" charset="-122"/>
@@ -9839,7 +9835,7 @@
             <a:r>
               <a:rPr lang="en-US" sz="2400" b="1" dirty="0">
                 <a:solidFill>
-                  <a:srgbClr val="22D3EE"/>
+                  <a:srgbClr val="A79DFF"/>
                 </a:solidFill>
                 <a:latin typeface="Calibri" pitchFamily="34" charset="0"/>
                 <a:ea typeface="Calibri" pitchFamily="34" charset="-122"/>
@@ -9864,15 +9860,15 @@
           </a:xfrm>
           <a:prstGeom prst="roundRect">
             <a:avLst>
-              <a:gd name="adj" fmla="val 4364"/>
+              <a:gd name="adj" fmla="val 1091"/>
             </a:avLst>
           </a:prstGeom>
           <a:solidFill>
-            <a:srgbClr val="111827"/>
+            <a:srgbClr val="121219"/>
           </a:solidFill>
           <a:ln w="12700">
             <a:solidFill>
-              <a:srgbClr val="1E3A5F"/>
+              <a:srgbClr val="32323E"/>
             </a:solidFill>
             <a:prstDash val="solid"/>
           </a:ln>
@@ -9905,7 +9901,7 @@
             <a:r>
               <a:rPr lang="en-US" sz="1500" b="1" dirty="0">
                 <a:solidFill>
-                  <a:srgbClr val="22D3EE"/>
+                  <a:srgbClr val="A79DFF"/>
                 </a:solidFill>
                 <a:latin typeface="Calibri" pitchFamily="34" charset="0"/>
                 <a:ea typeface="Calibri" pitchFamily="34" charset="-122"/>
@@ -9948,7 +9944,7 @@
             <a:r>
               <a:rPr lang="en-US" sz="1250" dirty="0">
                 <a:solidFill>
-                  <a:srgbClr val="F1F5F9"/>
+                  <a:srgbClr val="F5F5F8"/>
                 </a:solidFill>
                 <a:latin typeface="Calibri" pitchFamily="34" charset="0"/>
                 <a:ea typeface="Calibri" pitchFamily="34" charset="-122"/>
@@ -9969,7 +9965,7 @@
             <a:r>
               <a:rPr lang="en-US" sz="1250" dirty="0">
                 <a:solidFill>
-                  <a:srgbClr val="F1F5F9"/>
+                  <a:srgbClr val="F5F5F8"/>
                 </a:solidFill>
                 <a:latin typeface="Calibri" pitchFamily="34" charset="0"/>
                 <a:ea typeface="Calibri" pitchFamily="34" charset="-122"/>
@@ -9990,7 +9986,7 @@
             <a:r>
               <a:rPr lang="en-US" sz="1250" dirty="0">
                 <a:solidFill>
-                  <a:srgbClr val="F1F5F9"/>
+                  <a:srgbClr val="F5F5F8"/>
                 </a:solidFill>
                 <a:latin typeface="Calibri" pitchFamily="34" charset="0"/>
                 <a:ea typeface="Calibri" pitchFamily="34" charset="-122"/>
@@ -10011,7 +10007,7 @@
             <a:r>
               <a:rPr lang="en-US" sz="1250" dirty="0">
                 <a:solidFill>
-                  <a:srgbClr val="F1F5F9"/>
+                  <a:srgbClr val="F5F5F8"/>
                 </a:solidFill>
                 <a:latin typeface="Calibri" pitchFamily="34" charset="0"/>
                 <a:ea typeface="Calibri" pitchFamily="34" charset="-122"/>
@@ -10032,7 +10028,7 @@
             <a:r>
               <a:rPr lang="en-US" sz="1250" dirty="0">
                 <a:solidFill>
-                  <a:srgbClr val="F1F5F9"/>
+                  <a:srgbClr val="F5F5F8"/>
                 </a:solidFill>
                 <a:latin typeface="Calibri" pitchFamily="34" charset="0"/>
                 <a:ea typeface="Calibri" pitchFamily="34" charset="-122"/>
@@ -10057,15 +10053,15 @@
           </a:xfrm>
           <a:prstGeom prst="roundRect">
             <a:avLst>
-              <a:gd name="adj" fmla="val 4364"/>
+              <a:gd name="adj" fmla="val 1091"/>
             </a:avLst>
           </a:prstGeom>
           <a:solidFill>
-            <a:srgbClr val="1E293B"/>
+            <a:srgbClr val="1F1F29"/>
           </a:solidFill>
           <a:ln w="12700">
             <a:solidFill>
-              <a:srgbClr val="1E3A5F"/>
+              <a:srgbClr val="32323E"/>
             </a:solidFill>
             <a:prstDash val="solid"/>
           </a:ln>
@@ -10098,7 +10094,7 @@
             <a:r>
               <a:rPr lang="en-US" sz="1500" b="1" dirty="0">
                 <a:solidFill>
-                  <a:srgbClr val="F59E0B"/>
+                  <a:srgbClr val="F2A60C"/>
                 </a:solidFill>
                 <a:latin typeface="Calibri" pitchFamily="34" charset="0"/>
                 <a:ea typeface="Calibri" pitchFamily="34" charset="-122"/>
@@ -10141,7 +10137,7 @@
             <a:r>
               <a:rPr lang="en-US" sz="1200" dirty="0">
                 <a:solidFill>
-                  <a:srgbClr val="F1F5F9"/>
+                  <a:srgbClr val="F5F5F8"/>
                 </a:solidFill>
                 <a:latin typeface="Calibri" pitchFamily="34" charset="0"/>
                 <a:ea typeface="Calibri" pitchFamily="34" charset="-122"/>
@@ -10162,7 +10158,7 @@
             <a:r>
               <a:rPr lang="en-US" sz="1200" dirty="0">
                 <a:solidFill>
-                  <a:srgbClr val="F1F5F9"/>
+                  <a:srgbClr val="F5F5F8"/>
                 </a:solidFill>
                 <a:latin typeface="Calibri" pitchFamily="34" charset="0"/>
                 <a:ea typeface="Calibri" pitchFamily="34" charset="-122"/>
@@ -10183,7 +10179,7 @@
             <a:r>
               <a:rPr lang="en-US" sz="1200" dirty="0">
                 <a:solidFill>
-                  <a:srgbClr val="F1F5F9"/>
+                  <a:srgbClr val="F5F5F8"/>
                 </a:solidFill>
                 <a:latin typeface="Calibri" pitchFamily="34" charset="0"/>
                 <a:ea typeface="Calibri" pitchFamily="34" charset="-122"/>
@@ -10204,7 +10200,7 @@
             <a:r>
               <a:rPr lang="en-US" sz="1200" dirty="0">
                 <a:solidFill>
-                  <a:srgbClr val="F1F5F9"/>
+                  <a:srgbClr val="F5F5F8"/>
                 </a:solidFill>
                 <a:latin typeface="Calibri" pitchFamily="34" charset="0"/>
                 <a:ea typeface="Calibri" pitchFamily="34" charset="-122"/>
@@ -10225,7 +10221,7 @@
             <a:r>
               <a:rPr lang="en-US" sz="1200" dirty="0">
                 <a:solidFill>
-                  <a:srgbClr val="F1F5F9"/>
+                  <a:srgbClr val="F5F5F8"/>
                 </a:solidFill>
                 <a:latin typeface="Calibri" pitchFamily="34" charset="0"/>
                 <a:ea typeface="Calibri" pitchFamily="34" charset="-122"/>
@@ -10246,7 +10242,7 @@
             <a:r>
               <a:rPr lang="en-US" sz="1200" dirty="0">
                 <a:solidFill>
-                  <a:srgbClr val="F1F5F9"/>
+                  <a:srgbClr val="F5F5F8"/>
                 </a:solidFill>
                 <a:latin typeface="Calibri" pitchFamily="34" charset="0"/>
                 <a:ea typeface="Calibri" pitchFamily="34" charset="-122"/>
@@ -10285,7 +10281,7 @@
             <a:r>
               <a:rPr lang="en-US" sz="1300" dirty="0">
                 <a:solidFill>
-                  <a:srgbClr val="94A3B8"/>
+                  <a:srgbClr val="C4C6D2"/>
                 </a:solidFill>
                 <a:latin typeface="Calibri" pitchFamily="34" charset="0"/>
                 <a:ea typeface="Calibri" pitchFamily="34" charset="-122"/>
@@ -10324,13 +10320,13 @@
             <a:r>
               <a:rPr lang="en-US" sz="900" dirty="0">
                 <a:solidFill>
-                  <a:srgbClr val="64748B"/>
-                </a:solidFill>
-                <a:latin typeface="Calibri" pitchFamily="34" charset="0"/>
-                <a:ea typeface="Calibri" pitchFamily="34" charset="-122"/>
-                <a:cs typeface="Calibri" pitchFamily="34" charset="-120"/>
-              </a:rPr>
-              <a:t>NWIS · SIH26121 · synthetic demo data</a:t>
+                  <a:srgbClr val="8C8FA1"/>
+                </a:solidFill>
+                <a:latin typeface="Calibri" pitchFamily="34" charset="0"/>
+                <a:ea typeface="Calibri" pitchFamily="34" charset="-122"/>
+                <a:cs typeface="Calibri" pitchFamily="34" charset="-120"/>
+              </a:rPr>
+              <a:t>NWIS · SIH26121</a:t>
             </a:r>
             <a:endParaRPr lang="en-US" sz="900" dirty="0"/>
           </a:p>
@@ -10363,7 +10359,7 @@
             <a:r>
               <a:rPr lang="en-US" sz="900" dirty="0">
                 <a:solidFill>
-                  <a:srgbClr val="64748B"/>
+                  <a:srgbClr val="8C8FA1"/>
                 </a:solidFill>
                 <a:latin typeface="Calibri" pitchFamily="34" charset="0"/>
                 <a:ea typeface="Calibri" pitchFamily="34" charset="-122"/>
